--- a/docs/slides/Modulo 3/dia_3.pptx
+++ b/docs/slides/Modulo 3/dia_3.pptx
@@ -5,17 +5,21 @@
     <p:sldMasterId id="2147483648" r:id="rId1"/>
   </p:sldMasterIdLst>
   <p:sldIdLst>
-    <p:sldId id="256" r:id="rId7"/>
-    <p:sldId id="257" r:id="rId8"/>
-    <p:sldId id="258" r:id="rId9"/>
-    <p:sldId id="259" r:id="rId10"/>
-    <p:sldId id="260" r:id="rId11"/>
-    <p:sldId id="261" r:id="rId12"/>
-    <p:sldId id="262" r:id="rId13"/>
-    <p:sldId id="263" r:id="rId14"/>
-    <p:sldId id="264" r:id="rId15"/>
+    <p:sldId id="256" r:id="rId2"/>
+    <p:sldId id="257" r:id="rId3"/>
+    <p:sldId id="258" r:id="rId4"/>
+    <p:sldId id="259" r:id="rId5"/>
+    <p:sldId id="260" r:id="rId6"/>
+    <p:sldId id="261" r:id="rId7"/>
+    <p:sldId id="262" r:id="rId8"/>
+    <p:sldId id="263" r:id="rId9"/>
+    <p:sldId id="264" r:id="rId10"/>
+    <p:sldId id="267" r:id="rId11"/>
+    <p:sldId id="265" r:id="rId12"/>
+    <p:sldId id="266" r:id="rId13"/>
+    <p:sldId id="268" r:id="rId14"/>
   </p:sldIdLst>
-  <p:sldSz cx="12188952" cy="6858000" type="screen4x3"/>
+  <p:sldSz cx="12188825" cy="6858000"/>
   <p:notesSz cx="6858000" cy="9144000"/>
   <p:defaultTextStyle>
     <a:defPPr>
@@ -112,6 +116,22 @@
       </a:defRPr>
     </a:lvl9pPr>
   </p:defaultTextStyle>
+  <p:extLst>
+    <p:ext uri="{EFAFB233-063F-42B5-8137-9DF3F51BA10A}">
+      <p15:sldGuideLst xmlns:p15="http://schemas.microsoft.com/office/powerpoint/2012/main">
+        <p15:guide id="1" orient="horz" pos="2160">
+          <p15:clr>
+            <a:srgbClr val="A4A3A4"/>
+          </p15:clr>
+        </p15:guide>
+        <p15:guide id="2" pos="2880">
+          <p15:clr>
+            <a:srgbClr val="A4A3A4"/>
+          </p15:clr>
+        </p15:guide>
+      </p15:sldGuideLst>
+    </p:ext>
+  </p:extLst>
 </p:presentation>
 </file>
 
@@ -153,10 +173,9 @@
           <a:lstStyle/>
           <a:p>
             <a:r>
-              <a:rPr lang="en-US" smtClean="0"/>
+              <a:rPr lang="en-US"/>
               <a:t>Click to edit Master title style</a:t>
             </a:r>
-            <a:endParaRPr lang="en-US"/>
           </a:p>
         </p:txBody>
       </p:sp>
@@ -272,10 +291,9 @@
           </a:lstStyle>
           <a:p>
             <a:r>
-              <a:rPr lang="en-US" smtClean="0"/>
+              <a:rPr lang="en-US"/>
               <a:t>Click to edit Master subtitle style</a:t>
             </a:r>
-            <a:endParaRPr lang="en-US"/>
           </a:p>
         </p:txBody>
       </p:sp>
@@ -296,7 +314,7 @@
           <a:p>
             <a:fld id="{5BCAD085-E8A6-8845-BD4E-CB4CCA059FC4}" type="datetimeFigureOut">
               <a:rPr lang="en-US" smtClean="0"/>
-              <a:t>1/27/13</a:t>
+              <a:t>4/23/2026</a:t>
             </a:fld>
             <a:endParaRPr lang="en-US"/>
           </a:p>
@@ -338,7 +356,7 @@
           <a:p>
             <a:fld id="{C1FF6DA9-008F-8B48-92A6-B652298478BF}" type="slidenum">
               <a:rPr lang="en-US" smtClean="0"/>
-              <a:t>‹#›</a:t>
+              <a:t>‹Nº›</a:t>
             </a:fld>
             <a:endParaRPr lang="en-US"/>
           </a:p>
@@ -390,10 +408,9 @@
           <a:lstStyle/>
           <a:p>
             <a:r>
-              <a:rPr lang="en-US" smtClean="0"/>
+              <a:rPr lang="en-US"/>
               <a:t>Click to edit Master title style</a:t>
             </a:r>
-            <a:endParaRPr lang="en-US"/>
           </a:p>
         </p:txBody>
       </p:sp>
@@ -414,38 +431,37 @@
           <a:p>
             <a:pPr lvl="0"/>
             <a:r>
-              <a:rPr lang="en-US" smtClean="0"/>
+              <a:rPr lang="en-US"/>
               <a:t>Click to edit Master text styles</a:t>
             </a:r>
           </a:p>
           <a:p>
             <a:pPr lvl="1"/>
             <a:r>
-              <a:rPr lang="en-US" smtClean="0"/>
+              <a:rPr lang="en-US"/>
               <a:t>Second level</a:t>
             </a:r>
           </a:p>
           <a:p>
             <a:pPr lvl="2"/>
             <a:r>
-              <a:rPr lang="en-US" smtClean="0"/>
+              <a:rPr lang="en-US"/>
               <a:t>Third level</a:t>
             </a:r>
           </a:p>
           <a:p>
             <a:pPr lvl="3"/>
             <a:r>
-              <a:rPr lang="en-US" smtClean="0"/>
+              <a:rPr lang="en-US"/>
               <a:t>Fourth level</a:t>
             </a:r>
           </a:p>
           <a:p>
             <a:pPr lvl="4"/>
             <a:r>
-              <a:rPr lang="en-US" smtClean="0"/>
+              <a:rPr lang="en-US"/>
               <a:t>Fifth level</a:t>
             </a:r>
-            <a:endParaRPr lang="en-US"/>
           </a:p>
         </p:txBody>
       </p:sp>
@@ -466,7 +482,7 @@
           <a:p>
             <a:fld id="{5BCAD085-E8A6-8845-BD4E-CB4CCA059FC4}" type="datetimeFigureOut">
               <a:rPr lang="en-US" smtClean="0"/>
-              <a:t>1/27/13</a:t>
+              <a:t>4/23/2026</a:t>
             </a:fld>
             <a:endParaRPr lang="en-US"/>
           </a:p>
@@ -508,7 +524,7 @@
           <a:p>
             <a:fld id="{C1FF6DA9-008F-8B48-92A6-B652298478BF}" type="slidenum">
               <a:rPr lang="en-US" smtClean="0"/>
-              <a:t>‹#›</a:t>
+              <a:t>‹Nº›</a:t>
             </a:fld>
             <a:endParaRPr lang="en-US"/>
           </a:p>
@@ -565,10 +581,9 @@
           <a:lstStyle/>
           <a:p>
             <a:r>
-              <a:rPr lang="en-US" smtClean="0"/>
+              <a:rPr lang="en-US"/>
               <a:t>Click to edit Master title style</a:t>
             </a:r>
-            <a:endParaRPr lang="en-US"/>
           </a:p>
         </p:txBody>
       </p:sp>
@@ -594,38 +609,37 @@
           <a:p>
             <a:pPr lvl="0"/>
             <a:r>
-              <a:rPr lang="en-US" smtClean="0"/>
+              <a:rPr lang="en-US"/>
               <a:t>Click to edit Master text styles</a:t>
             </a:r>
           </a:p>
           <a:p>
             <a:pPr lvl="1"/>
             <a:r>
-              <a:rPr lang="en-US" smtClean="0"/>
+              <a:rPr lang="en-US"/>
               <a:t>Second level</a:t>
             </a:r>
           </a:p>
           <a:p>
             <a:pPr lvl="2"/>
             <a:r>
-              <a:rPr lang="en-US" smtClean="0"/>
+              <a:rPr lang="en-US"/>
               <a:t>Third level</a:t>
             </a:r>
           </a:p>
           <a:p>
             <a:pPr lvl="3"/>
             <a:r>
-              <a:rPr lang="en-US" smtClean="0"/>
+              <a:rPr lang="en-US"/>
               <a:t>Fourth level</a:t>
             </a:r>
           </a:p>
           <a:p>
             <a:pPr lvl="4"/>
             <a:r>
-              <a:rPr lang="en-US" smtClean="0"/>
+              <a:rPr lang="en-US"/>
               <a:t>Fifth level</a:t>
             </a:r>
-            <a:endParaRPr lang="en-US"/>
           </a:p>
         </p:txBody>
       </p:sp>
@@ -646,7 +660,7 @@
           <a:p>
             <a:fld id="{5BCAD085-E8A6-8845-BD4E-CB4CCA059FC4}" type="datetimeFigureOut">
               <a:rPr lang="en-US" smtClean="0"/>
-              <a:t>1/27/13</a:t>
+              <a:t>4/23/2026</a:t>
             </a:fld>
             <a:endParaRPr lang="en-US"/>
           </a:p>
@@ -688,7 +702,7 @@
           <a:p>
             <a:fld id="{C1FF6DA9-008F-8B48-92A6-B652298478BF}" type="slidenum">
               <a:rPr lang="en-US" smtClean="0"/>
-              <a:t>‹#›</a:t>
+              <a:t>‹Nº›</a:t>
             </a:fld>
             <a:endParaRPr lang="en-US"/>
           </a:p>
@@ -740,10 +754,9 @@
           <a:lstStyle/>
           <a:p>
             <a:r>
-              <a:rPr lang="en-US" smtClean="0"/>
+              <a:rPr lang="en-US"/>
               <a:t>Click to edit Master title style</a:t>
             </a:r>
-            <a:endParaRPr lang="en-US"/>
           </a:p>
         </p:txBody>
       </p:sp>
@@ -764,38 +777,37 @@
           <a:p>
             <a:pPr lvl="0"/>
             <a:r>
-              <a:rPr lang="en-US" smtClean="0"/>
+              <a:rPr lang="en-US"/>
               <a:t>Click to edit Master text styles</a:t>
             </a:r>
           </a:p>
           <a:p>
             <a:pPr lvl="1"/>
             <a:r>
-              <a:rPr lang="en-US" smtClean="0"/>
+              <a:rPr lang="en-US"/>
               <a:t>Second level</a:t>
             </a:r>
           </a:p>
           <a:p>
             <a:pPr lvl="2"/>
             <a:r>
-              <a:rPr lang="en-US" smtClean="0"/>
+              <a:rPr lang="en-US"/>
               <a:t>Third level</a:t>
             </a:r>
           </a:p>
           <a:p>
             <a:pPr lvl="3"/>
             <a:r>
-              <a:rPr lang="en-US" smtClean="0"/>
+              <a:rPr lang="en-US"/>
               <a:t>Fourth level</a:t>
             </a:r>
           </a:p>
           <a:p>
             <a:pPr lvl="4"/>
             <a:r>
-              <a:rPr lang="en-US" smtClean="0"/>
+              <a:rPr lang="en-US"/>
               <a:t>Fifth level</a:t>
             </a:r>
-            <a:endParaRPr lang="en-US"/>
           </a:p>
         </p:txBody>
       </p:sp>
@@ -816,7 +828,7 @@
           <a:p>
             <a:fld id="{5BCAD085-E8A6-8845-BD4E-CB4CCA059FC4}" type="datetimeFigureOut">
               <a:rPr lang="en-US" smtClean="0"/>
-              <a:t>1/27/13</a:t>
+              <a:t>4/23/2026</a:t>
             </a:fld>
             <a:endParaRPr lang="en-US"/>
           </a:p>
@@ -858,7 +870,7 @@
           <a:p>
             <a:fld id="{C1FF6DA9-008F-8B48-92A6-B652298478BF}" type="slidenum">
               <a:rPr lang="en-US" smtClean="0"/>
-              <a:t>‹#›</a:t>
+              <a:t>‹Nº›</a:t>
             </a:fld>
             <a:endParaRPr lang="en-US"/>
           </a:p>
@@ -919,10 +931,9 @@
           </a:lstStyle>
           <a:p>
             <a:r>
-              <a:rPr lang="en-US" smtClean="0"/>
+              <a:rPr lang="en-US"/>
               <a:t>Click to edit Master title style</a:t>
             </a:r>
-            <a:endParaRPr lang="en-US"/>
           </a:p>
         </p:txBody>
       </p:sp>
@@ -1039,7 +1050,7 @@
           <a:p>
             <a:pPr lvl="0"/>
             <a:r>
-              <a:rPr lang="en-US" smtClean="0"/>
+              <a:rPr lang="en-US"/>
               <a:t>Click to edit Master text styles</a:t>
             </a:r>
           </a:p>
@@ -1062,7 +1073,7 @@
           <a:p>
             <a:fld id="{5BCAD085-E8A6-8845-BD4E-CB4CCA059FC4}" type="datetimeFigureOut">
               <a:rPr lang="en-US" smtClean="0"/>
-              <a:t>1/27/13</a:t>
+              <a:t>4/23/2026</a:t>
             </a:fld>
             <a:endParaRPr lang="en-US"/>
           </a:p>
@@ -1104,7 +1115,7 @@
           <a:p>
             <a:fld id="{C1FF6DA9-008F-8B48-92A6-B652298478BF}" type="slidenum">
               <a:rPr lang="en-US" smtClean="0"/>
-              <a:t>‹#›</a:t>
+              <a:t>‹Nº›</a:t>
             </a:fld>
             <a:endParaRPr lang="en-US"/>
           </a:p>
@@ -1156,10 +1167,9 @@
           <a:lstStyle/>
           <a:p>
             <a:r>
-              <a:rPr lang="en-US" smtClean="0"/>
+              <a:rPr lang="en-US"/>
               <a:t>Click to edit Master title style</a:t>
             </a:r>
-            <a:endParaRPr lang="en-US"/>
           </a:p>
         </p:txBody>
       </p:sp>
@@ -1213,38 +1223,37 @@
           <a:p>
             <a:pPr lvl="0"/>
             <a:r>
-              <a:rPr lang="en-US" smtClean="0"/>
+              <a:rPr lang="en-US"/>
               <a:t>Click to edit Master text styles</a:t>
             </a:r>
           </a:p>
           <a:p>
             <a:pPr lvl="1"/>
             <a:r>
-              <a:rPr lang="en-US" smtClean="0"/>
+              <a:rPr lang="en-US"/>
               <a:t>Second level</a:t>
             </a:r>
           </a:p>
           <a:p>
             <a:pPr lvl="2"/>
             <a:r>
-              <a:rPr lang="en-US" smtClean="0"/>
+              <a:rPr lang="en-US"/>
               <a:t>Third level</a:t>
             </a:r>
           </a:p>
           <a:p>
             <a:pPr lvl="3"/>
             <a:r>
-              <a:rPr lang="en-US" smtClean="0"/>
+              <a:rPr lang="en-US"/>
               <a:t>Fourth level</a:t>
             </a:r>
           </a:p>
           <a:p>
             <a:pPr lvl="4"/>
             <a:r>
-              <a:rPr lang="en-US" smtClean="0"/>
+              <a:rPr lang="en-US"/>
               <a:t>Fifth level</a:t>
             </a:r>
-            <a:endParaRPr lang="en-US"/>
           </a:p>
         </p:txBody>
       </p:sp>
@@ -1298,38 +1307,37 @@
           <a:p>
             <a:pPr lvl="0"/>
             <a:r>
-              <a:rPr lang="en-US" smtClean="0"/>
+              <a:rPr lang="en-US"/>
               <a:t>Click to edit Master text styles</a:t>
             </a:r>
           </a:p>
           <a:p>
             <a:pPr lvl="1"/>
             <a:r>
-              <a:rPr lang="en-US" smtClean="0"/>
+              <a:rPr lang="en-US"/>
               <a:t>Second level</a:t>
             </a:r>
           </a:p>
           <a:p>
             <a:pPr lvl="2"/>
             <a:r>
-              <a:rPr lang="en-US" smtClean="0"/>
+              <a:rPr lang="en-US"/>
               <a:t>Third level</a:t>
             </a:r>
           </a:p>
           <a:p>
             <a:pPr lvl="3"/>
             <a:r>
-              <a:rPr lang="en-US" smtClean="0"/>
+              <a:rPr lang="en-US"/>
               <a:t>Fourth level</a:t>
             </a:r>
           </a:p>
           <a:p>
             <a:pPr lvl="4"/>
             <a:r>
-              <a:rPr lang="en-US" smtClean="0"/>
+              <a:rPr lang="en-US"/>
               <a:t>Fifth level</a:t>
             </a:r>
-            <a:endParaRPr lang="en-US"/>
           </a:p>
         </p:txBody>
       </p:sp>
@@ -1350,7 +1358,7 @@
           <a:p>
             <a:fld id="{5BCAD085-E8A6-8845-BD4E-CB4CCA059FC4}" type="datetimeFigureOut">
               <a:rPr lang="en-US" smtClean="0"/>
-              <a:t>1/27/13</a:t>
+              <a:t>4/23/2026</a:t>
             </a:fld>
             <a:endParaRPr lang="en-US"/>
           </a:p>
@@ -1392,7 +1400,7 @@
           <a:p>
             <a:fld id="{C1FF6DA9-008F-8B48-92A6-B652298478BF}" type="slidenum">
               <a:rPr lang="en-US" smtClean="0"/>
-              <a:t>‹#›</a:t>
+              <a:t>‹Nº›</a:t>
             </a:fld>
             <a:endParaRPr lang="en-US"/>
           </a:p>
@@ -1448,10 +1456,9 @@
           </a:lstStyle>
           <a:p>
             <a:r>
-              <a:rPr lang="en-US" smtClean="0"/>
+              <a:rPr lang="en-US"/>
               <a:t>Click to edit Master title style</a:t>
             </a:r>
-            <a:endParaRPr lang="en-US"/>
           </a:p>
         </p:txBody>
       </p:sp>
@@ -1514,7 +1521,7 @@
           <a:p>
             <a:pPr lvl="0"/>
             <a:r>
-              <a:rPr lang="en-US" smtClean="0"/>
+              <a:rPr lang="en-US"/>
               <a:t>Click to edit Master text styles</a:t>
             </a:r>
           </a:p>
@@ -1570,38 +1577,37 @@
           <a:p>
             <a:pPr lvl="0"/>
             <a:r>
-              <a:rPr lang="en-US" smtClean="0"/>
+              <a:rPr lang="en-US"/>
               <a:t>Click to edit Master text styles</a:t>
             </a:r>
           </a:p>
           <a:p>
             <a:pPr lvl="1"/>
             <a:r>
-              <a:rPr lang="en-US" smtClean="0"/>
+              <a:rPr lang="en-US"/>
               <a:t>Second level</a:t>
             </a:r>
           </a:p>
           <a:p>
             <a:pPr lvl="2"/>
             <a:r>
-              <a:rPr lang="en-US" smtClean="0"/>
+              <a:rPr lang="en-US"/>
               <a:t>Third level</a:t>
             </a:r>
           </a:p>
           <a:p>
             <a:pPr lvl="3"/>
             <a:r>
-              <a:rPr lang="en-US" smtClean="0"/>
+              <a:rPr lang="en-US"/>
               <a:t>Fourth level</a:t>
             </a:r>
           </a:p>
           <a:p>
             <a:pPr lvl="4"/>
             <a:r>
-              <a:rPr lang="en-US" smtClean="0"/>
+              <a:rPr lang="en-US"/>
               <a:t>Fifth level</a:t>
             </a:r>
-            <a:endParaRPr lang="en-US"/>
           </a:p>
         </p:txBody>
       </p:sp>
@@ -1664,7 +1670,7 @@
           <a:p>
             <a:pPr lvl="0"/>
             <a:r>
-              <a:rPr lang="en-US" smtClean="0"/>
+              <a:rPr lang="en-US"/>
               <a:t>Click to edit Master text styles</a:t>
             </a:r>
           </a:p>
@@ -1720,38 +1726,37 @@
           <a:p>
             <a:pPr lvl="0"/>
             <a:r>
-              <a:rPr lang="en-US" smtClean="0"/>
+              <a:rPr lang="en-US"/>
               <a:t>Click to edit Master text styles</a:t>
             </a:r>
           </a:p>
           <a:p>
             <a:pPr lvl="1"/>
             <a:r>
-              <a:rPr lang="en-US" smtClean="0"/>
+              <a:rPr lang="en-US"/>
               <a:t>Second level</a:t>
             </a:r>
           </a:p>
           <a:p>
             <a:pPr lvl="2"/>
             <a:r>
-              <a:rPr lang="en-US" smtClean="0"/>
+              <a:rPr lang="en-US"/>
               <a:t>Third level</a:t>
             </a:r>
           </a:p>
           <a:p>
             <a:pPr lvl="3"/>
             <a:r>
-              <a:rPr lang="en-US" smtClean="0"/>
+              <a:rPr lang="en-US"/>
               <a:t>Fourth level</a:t>
             </a:r>
           </a:p>
           <a:p>
             <a:pPr lvl="4"/>
             <a:r>
-              <a:rPr lang="en-US" smtClean="0"/>
+              <a:rPr lang="en-US"/>
               <a:t>Fifth level</a:t>
             </a:r>
-            <a:endParaRPr lang="en-US"/>
           </a:p>
         </p:txBody>
       </p:sp>
@@ -1772,7 +1777,7 @@
           <a:p>
             <a:fld id="{5BCAD085-E8A6-8845-BD4E-CB4CCA059FC4}" type="datetimeFigureOut">
               <a:rPr lang="en-US" smtClean="0"/>
-              <a:t>1/27/13</a:t>
+              <a:t>4/23/2026</a:t>
             </a:fld>
             <a:endParaRPr lang="en-US"/>
           </a:p>
@@ -1814,7 +1819,7 @@
           <a:p>
             <a:fld id="{C1FF6DA9-008F-8B48-92A6-B652298478BF}" type="slidenum">
               <a:rPr lang="en-US" smtClean="0"/>
-              <a:t>‹#›</a:t>
+              <a:t>‹Nº›</a:t>
             </a:fld>
             <a:endParaRPr lang="en-US"/>
           </a:p>
@@ -1866,10 +1871,9 @@
           <a:lstStyle/>
           <a:p>
             <a:r>
-              <a:rPr lang="en-US" smtClean="0"/>
+              <a:rPr lang="en-US"/>
               <a:t>Click to edit Master title style</a:t>
             </a:r>
-            <a:endParaRPr lang="en-US"/>
           </a:p>
         </p:txBody>
       </p:sp>
@@ -1890,7 +1894,7 @@
           <a:p>
             <a:fld id="{5BCAD085-E8A6-8845-BD4E-CB4CCA059FC4}" type="datetimeFigureOut">
               <a:rPr lang="en-US" smtClean="0"/>
-              <a:t>1/27/13</a:t>
+              <a:t>4/23/2026</a:t>
             </a:fld>
             <a:endParaRPr lang="en-US"/>
           </a:p>
@@ -1932,7 +1936,7 @@
           <a:p>
             <a:fld id="{C1FF6DA9-008F-8B48-92A6-B652298478BF}" type="slidenum">
               <a:rPr lang="en-US" smtClean="0"/>
-              <a:t>‹#›</a:t>
+              <a:t>‹Nº›</a:t>
             </a:fld>
             <a:endParaRPr lang="en-US"/>
           </a:p>
@@ -1985,7 +1989,7 @@
           <a:p>
             <a:fld id="{5BCAD085-E8A6-8845-BD4E-CB4CCA059FC4}" type="datetimeFigureOut">
               <a:rPr lang="en-US" smtClean="0"/>
-              <a:t>1/27/13</a:t>
+              <a:t>4/23/2026</a:t>
             </a:fld>
             <a:endParaRPr lang="en-US"/>
           </a:p>
@@ -2027,7 +2031,7 @@
           <a:p>
             <a:fld id="{C1FF6DA9-008F-8B48-92A6-B652298478BF}" type="slidenum">
               <a:rPr lang="en-US" smtClean="0"/>
-              <a:t>‹#›</a:t>
+              <a:t>‹Nº›</a:t>
             </a:fld>
             <a:endParaRPr lang="en-US"/>
           </a:p>
@@ -2088,10 +2092,9 @@
           </a:lstStyle>
           <a:p>
             <a:r>
-              <a:rPr lang="en-US" smtClean="0"/>
+              <a:rPr lang="en-US"/>
               <a:t>Click to edit Master title style</a:t>
             </a:r>
-            <a:endParaRPr lang="en-US"/>
           </a:p>
         </p:txBody>
       </p:sp>
@@ -2145,38 +2148,37 @@
           <a:p>
             <a:pPr lvl="0"/>
             <a:r>
-              <a:rPr lang="en-US" smtClean="0"/>
+              <a:rPr lang="en-US"/>
               <a:t>Click to edit Master text styles</a:t>
             </a:r>
           </a:p>
           <a:p>
             <a:pPr lvl="1"/>
             <a:r>
-              <a:rPr lang="en-US" smtClean="0"/>
+              <a:rPr lang="en-US"/>
               <a:t>Second level</a:t>
             </a:r>
           </a:p>
           <a:p>
             <a:pPr lvl="2"/>
             <a:r>
-              <a:rPr lang="en-US" smtClean="0"/>
+              <a:rPr lang="en-US"/>
               <a:t>Third level</a:t>
             </a:r>
           </a:p>
           <a:p>
             <a:pPr lvl="3"/>
             <a:r>
-              <a:rPr lang="en-US" smtClean="0"/>
+              <a:rPr lang="en-US"/>
               <a:t>Fourth level</a:t>
             </a:r>
           </a:p>
           <a:p>
             <a:pPr lvl="4"/>
             <a:r>
-              <a:rPr lang="en-US" smtClean="0"/>
+              <a:rPr lang="en-US"/>
               <a:t>Fifth level</a:t>
             </a:r>
-            <a:endParaRPr lang="en-US"/>
           </a:p>
         </p:txBody>
       </p:sp>
@@ -2239,7 +2241,7 @@
           <a:p>
             <a:pPr lvl="0"/>
             <a:r>
-              <a:rPr lang="en-US" smtClean="0"/>
+              <a:rPr lang="en-US"/>
               <a:t>Click to edit Master text styles</a:t>
             </a:r>
           </a:p>
@@ -2262,7 +2264,7 @@
           <a:p>
             <a:fld id="{5BCAD085-E8A6-8845-BD4E-CB4CCA059FC4}" type="datetimeFigureOut">
               <a:rPr lang="en-US" smtClean="0"/>
-              <a:t>1/27/13</a:t>
+              <a:t>4/23/2026</a:t>
             </a:fld>
             <a:endParaRPr lang="en-US"/>
           </a:p>
@@ -2304,7 +2306,7 @@
           <a:p>
             <a:fld id="{C1FF6DA9-008F-8B48-92A6-B652298478BF}" type="slidenum">
               <a:rPr lang="en-US" smtClean="0"/>
-              <a:t>‹#›</a:t>
+              <a:t>‹Nº›</a:t>
             </a:fld>
             <a:endParaRPr lang="en-US"/>
           </a:p>
@@ -2365,10 +2367,9 @@
           </a:lstStyle>
           <a:p>
             <a:r>
-              <a:rPr lang="en-US" smtClean="0"/>
+              <a:rPr lang="en-US"/>
               <a:t>Click to edit Master title style</a:t>
             </a:r>
-            <a:endParaRPr lang="en-US"/>
           </a:p>
         </p:txBody>
       </p:sp>
@@ -2492,7 +2493,7 @@
           <a:p>
             <a:pPr lvl="0"/>
             <a:r>
-              <a:rPr lang="en-US" smtClean="0"/>
+              <a:rPr lang="en-US"/>
               <a:t>Click to edit Master text styles</a:t>
             </a:r>
           </a:p>
@@ -2515,7 +2516,7 @@
           <a:p>
             <a:fld id="{5BCAD085-E8A6-8845-BD4E-CB4CCA059FC4}" type="datetimeFigureOut">
               <a:rPr lang="en-US" smtClean="0"/>
-              <a:t>1/27/13</a:t>
+              <a:t>4/23/2026</a:t>
             </a:fld>
             <a:endParaRPr lang="en-US"/>
           </a:p>
@@ -2557,7 +2558,7 @@
           <a:p>
             <a:fld id="{C1FF6DA9-008F-8B48-92A6-B652298478BF}" type="slidenum">
               <a:rPr lang="en-US" smtClean="0"/>
-              <a:t>‹#›</a:t>
+              <a:t>‹Nº›</a:t>
             </a:fld>
             <a:endParaRPr lang="en-US"/>
           </a:p>
@@ -2624,10 +2625,9 @@
           <a:lstStyle/>
           <a:p>
             <a:r>
-              <a:rPr lang="en-US" smtClean="0"/>
+              <a:rPr lang="en-US"/>
               <a:t>Click to edit Master title style</a:t>
             </a:r>
-            <a:endParaRPr lang="en-US"/>
           </a:p>
         </p:txBody>
       </p:sp>
@@ -2658,38 +2658,37 @@
           <a:p>
             <a:pPr lvl="0"/>
             <a:r>
-              <a:rPr lang="en-US" smtClean="0"/>
+              <a:rPr lang="en-US"/>
               <a:t>Click to edit Master text styles</a:t>
             </a:r>
           </a:p>
           <a:p>
             <a:pPr lvl="1"/>
             <a:r>
-              <a:rPr lang="en-US" smtClean="0"/>
+              <a:rPr lang="en-US"/>
               <a:t>Second level</a:t>
             </a:r>
           </a:p>
           <a:p>
             <a:pPr lvl="2"/>
             <a:r>
-              <a:rPr lang="en-US" smtClean="0"/>
+              <a:rPr lang="en-US"/>
               <a:t>Third level</a:t>
             </a:r>
           </a:p>
           <a:p>
             <a:pPr lvl="3"/>
             <a:r>
-              <a:rPr lang="en-US" smtClean="0"/>
+              <a:rPr lang="en-US"/>
               <a:t>Fourth level</a:t>
             </a:r>
           </a:p>
           <a:p>
             <a:pPr lvl="4"/>
             <a:r>
-              <a:rPr lang="en-US" smtClean="0"/>
+              <a:rPr lang="en-US"/>
               <a:t>Fifth level</a:t>
             </a:r>
-            <a:endParaRPr lang="en-US"/>
           </a:p>
         </p:txBody>
       </p:sp>
@@ -2728,7 +2727,7 @@
           <a:p>
             <a:fld id="{5BCAD085-E8A6-8845-BD4E-CB4CCA059FC4}" type="datetimeFigureOut">
               <a:rPr lang="en-US" smtClean="0"/>
-              <a:t>1/27/13</a:t>
+              <a:t>4/23/2026</a:t>
             </a:fld>
             <a:endParaRPr lang="en-US"/>
           </a:p>
@@ -2806,7 +2805,7 @@
           <a:p>
             <a:fld id="{C1FF6DA9-008F-8B48-92A6-B652298478BF}" type="slidenum">
               <a:rPr lang="en-US" smtClean="0"/>
-              <a:t>‹#›</a:t>
+              <a:t>‹Nº›</a:t>
             </a:fld>
             <a:endParaRPr lang="en-US"/>
           </a:p>
@@ -3087,7 +3086,7 @@
 </file>
 
 <file path=ppt/slides/slide1.xml><?xml version="1.0" encoding="utf-8"?>
-<p:sld xmlns:a="http://schemas.openxmlformats.org/drawingml/2006/main" xmlns:p="http://schemas.openxmlformats.org/presentationml/2006/main" xmlns:r="http://schemas.openxmlformats.org/officeDocument/2006/relationships">
+<p:sld xmlns:a="http://schemas.openxmlformats.org/drawingml/2006/main" xmlns:r="http://schemas.openxmlformats.org/officeDocument/2006/relationships" xmlns:p="http://schemas.openxmlformats.org/presentationml/2006/main">
   <p:cSld>
     <p:spTree>
       <p:nvGrpSpPr>
@@ -3095,7 +3094,14 @@
         <p:cNvGrpSpPr/>
         <p:nvPr/>
       </p:nvGrpSpPr>
-      <p:grpSpPr/>
+      <p:grpSpPr>
+        <a:xfrm>
+          <a:off x="0" y="0"/>
+          <a:ext cx="0" cy="0"/>
+          <a:chOff x="0" y="0"/>
+          <a:chExt cx="0" cy="0"/>
+        </a:xfrm>
+      </p:grpSpPr>
       <p:sp>
         <p:nvSpPr>
           <p:cNvPr id="2" name="Rectangle 1"/>
@@ -3136,6 +3142,7 @@
           <a:lstStyle/>
           <a:p>
             <a:pPr algn="ctr"/>
+            <a:endParaRPr/>
           </a:p>
         </p:txBody>
       </p:sp>
@@ -3179,6 +3186,7 @@
           <a:lstStyle/>
           <a:p>
             <a:pPr algn="ctr"/>
+            <a:endParaRPr/>
           </a:p>
         </p:txBody>
       </p:sp>
@@ -3296,19 +3304,38 @@
 </p:sld>
 </file>
 
-<file path=ppt/slides/slide2.xml><?xml version="1.0" encoding="utf-8"?>
-<p:sld xmlns:a="http://schemas.openxmlformats.org/drawingml/2006/main" xmlns:p="http://schemas.openxmlformats.org/presentationml/2006/main" xmlns:r="http://schemas.openxmlformats.org/officeDocument/2006/relationships">
+<file path=ppt/slides/slide10.xml><?xml version="1.0" encoding="utf-8"?>
+<p:sld xmlns:a="http://schemas.openxmlformats.org/drawingml/2006/main" xmlns:r="http://schemas.openxmlformats.org/officeDocument/2006/relationships" xmlns:p="http://schemas.openxmlformats.org/presentationml/2006/main">
   <p:cSld>
     <p:spTree>
       <p:nvGrpSpPr>
-        <p:cNvPr id="1" name=""/>
+        <p:cNvPr id="1" name="">
+          <a:extLst>
+            <a:ext uri="{FF2B5EF4-FFF2-40B4-BE49-F238E27FC236}">
+              <a16:creationId xmlns:a16="http://schemas.microsoft.com/office/drawing/2014/main" id="{BEA0DF4C-6600-94C1-F17D-4ABBB12112D7}"/>
+            </a:ext>
+          </a:extLst>
+        </p:cNvPr>
         <p:cNvGrpSpPr/>
         <p:nvPr/>
       </p:nvGrpSpPr>
-      <p:grpSpPr/>
-      <p:sp>
-        <p:nvSpPr>
-          <p:cNvPr id="2" name="Rectangle 1"/>
+      <p:grpSpPr>
+        <a:xfrm>
+          <a:off x="0" y="0"/>
+          <a:ext cx="0" cy="0"/>
+          <a:chOff x="0" y="0"/>
+          <a:chExt cx="0" cy="0"/>
+        </a:xfrm>
+      </p:grpSpPr>
+      <p:sp>
+        <p:nvSpPr>
+          <p:cNvPr id="2" name="Rectangle 1">
+            <a:extLst>
+              <a:ext uri="{FF2B5EF4-FFF2-40B4-BE49-F238E27FC236}">
+                <a16:creationId xmlns:a16="http://schemas.microsoft.com/office/drawing/2014/main" id="{B8F3F762-3B2C-24CE-CBD7-D92BE3C5B448}"/>
+              </a:ext>
+            </a:extLst>
+          </p:cNvPr>
           <p:cNvSpPr/>
           <p:nvPr/>
         </p:nvSpPr>
@@ -3346,12 +3373,19 @@
           <a:lstStyle/>
           <a:p>
             <a:pPr algn="ctr"/>
-          </a:p>
-        </p:txBody>
-      </p:sp>
-      <p:sp>
-        <p:nvSpPr>
-          <p:cNvPr id="3" name="TextBox 2"/>
+            <a:endParaRPr/>
+          </a:p>
+        </p:txBody>
+      </p:sp>
+      <p:sp>
+        <p:nvSpPr>
+          <p:cNvPr id="3" name="TextBox 2">
+            <a:extLst>
+              <a:ext uri="{FF2B5EF4-FFF2-40B4-BE49-F238E27FC236}">
+                <a16:creationId xmlns:a16="http://schemas.microsoft.com/office/drawing/2014/main" id="{B1AF2038-8444-91B3-5D73-DD019909E67E}"/>
+              </a:ext>
+            </a:extLst>
+          </p:cNvPr>
           <p:cNvSpPr txBox="1"/>
           <p:nvPr/>
         </p:nvSpPr>
@@ -3378,14 +3412,20 @@
               </a:defRPr>
             </a:pPr>
             <a:r>
-              <a:t>¿Que es la gobernanza de un consorcio?</a:t>
-            </a:r>
-          </a:p>
-        </p:txBody>
-      </p:sp>
-      <p:sp>
-        <p:nvSpPr>
-          <p:cNvPr id="4" name="Rectangle 3"/>
+              <a:t>Respuestas al debate: gobernanza consorcio KYC</a:t>
+            </a:r>
+          </a:p>
+        </p:txBody>
+      </p:sp>
+      <p:sp>
+        <p:nvSpPr>
+          <p:cNvPr id="4" name="Rectangle 3">
+            <a:extLst>
+              <a:ext uri="{FF2B5EF4-FFF2-40B4-BE49-F238E27FC236}">
+                <a16:creationId xmlns:a16="http://schemas.microsoft.com/office/drawing/2014/main" id="{1A20898B-7859-C38A-ED92-8286103E29EB}"/>
+              </a:ext>
+            </a:extLst>
+          </p:cNvPr>
           <p:cNvSpPr/>
           <p:nvPr/>
         </p:nvSpPr>
@@ -3423,19 +3463,26 @@
           <a:lstStyle/>
           <a:p>
             <a:pPr algn="ctr"/>
-          </a:p>
-        </p:txBody>
-      </p:sp>
-      <p:sp>
-        <p:nvSpPr>
-          <p:cNvPr id="5" name="TextBox 4"/>
+            <a:endParaRPr/>
+          </a:p>
+        </p:txBody>
+      </p:sp>
+      <p:sp>
+        <p:nvSpPr>
+          <p:cNvPr id="5" name="TextBox 4">
+            <a:extLst>
+              <a:ext uri="{FF2B5EF4-FFF2-40B4-BE49-F238E27FC236}">
+                <a16:creationId xmlns:a16="http://schemas.microsoft.com/office/drawing/2014/main" id="{7E567B94-98B8-9119-A4A6-7610C50E64C6}"/>
+              </a:ext>
+            </a:extLst>
+          </p:cNvPr>
           <p:cNvSpPr txBox="1"/>
           <p:nvPr/>
         </p:nvSpPr>
         <p:spPr>
           <a:xfrm>
             <a:off x="640080" y="1280160"/>
-            <a:ext cx="10515600" cy="5029200"/>
+            <a:ext cx="10515600" cy="4088299"/>
           </a:xfrm>
           <a:prstGeom prst="rect">
             <a:avLst/>
@@ -3460,7 +3507,203 @@
               </a:defRPr>
             </a:pPr>
             <a:r>
-              <a:t>El conjunto de reglas que definen como se toman las decisiones en la red</a:t>
+              <a:rPr dirty="0"/>
+              <a:t>1. Modelo de </a:t>
+            </a:r>
+            <a:r>
+              <a:rPr dirty="0" err="1"/>
+              <a:t>gobernanza</a:t>
+            </a:r>
+            <a:r>
+              <a:rPr dirty="0"/>
+              <a:t>:</a:t>
+            </a:r>
+          </a:p>
+          <a:p>
+            <a:pPr lvl="1">
+              <a:spcAft>
+                <a:spcPts val="400"/>
+              </a:spcAft>
+              <a:defRPr sz="1700">
+                <a:solidFill>
+                  <a:srgbClr val="666666"/>
+                </a:solidFill>
+                <a:latin typeface="Calibri"/>
+              </a:defRPr>
+            </a:pPr>
+            <a:r>
+              <a:rPr dirty="0"/>
+              <a:t>    </a:t>
+            </a:r>
+            <a:r>
+              <a:rPr dirty="0" err="1"/>
+              <a:t>Federado</a:t>
+            </a:r>
+            <a:r>
+              <a:rPr dirty="0"/>
+              <a:t> con </a:t>
+            </a:r>
+            <a:r>
+              <a:rPr dirty="0" err="1"/>
+              <a:t>comite</a:t>
+            </a:r>
+            <a:r>
+              <a:rPr dirty="0"/>
+              <a:t> </a:t>
+            </a:r>
+            <a:r>
+              <a:rPr dirty="0" err="1"/>
+              <a:t>rotativo</a:t>
+            </a:r>
+            <a:r>
+              <a:rPr dirty="0"/>
+              <a:t>: </a:t>
+            </a:r>
+            <a:r>
+              <a:rPr dirty="0" err="1"/>
+              <a:t>evita</a:t>
+            </a:r>
+            <a:r>
+              <a:rPr dirty="0"/>
+              <a:t> </a:t>
+            </a:r>
+            <a:r>
+              <a:rPr dirty="0" err="1"/>
+              <a:t>que</a:t>
+            </a:r>
+            <a:r>
+              <a:rPr dirty="0"/>
+              <a:t> un banco domine.</a:t>
+            </a:r>
+          </a:p>
+          <a:p>
+            <a:pPr lvl="1">
+              <a:spcAft>
+                <a:spcPts val="400"/>
+              </a:spcAft>
+              <a:defRPr sz="1700">
+                <a:solidFill>
+                  <a:srgbClr val="666666"/>
+                </a:solidFill>
+                <a:latin typeface="Calibri"/>
+              </a:defRPr>
+            </a:pPr>
+            <a:r>
+              <a:rPr dirty="0"/>
+              <a:t>    Alternativa: </a:t>
+            </a:r>
+            <a:r>
+              <a:rPr dirty="0" err="1"/>
+              <a:t>democratico</a:t>
+            </a:r>
+            <a:r>
+              <a:rPr dirty="0"/>
+              <a:t> (1 banco = 1 </a:t>
+            </a:r>
+            <a:r>
+              <a:rPr dirty="0" err="1"/>
+              <a:t>voto</a:t>
+            </a:r>
+            <a:r>
+              <a:rPr dirty="0"/>
+              <a:t>) </a:t>
+            </a:r>
+            <a:r>
+              <a:rPr dirty="0" err="1"/>
+              <a:t>si</a:t>
+            </a:r>
+            <a:r>
+              <a:rPr dirty="0"/>
+              <a:t> son comparables </a:t>
+            </a:r>
+            <a:r>
+              <a:rPr dirty="0" err="1"/>
+              <a:t>en</a:t>
+            </a:r>
+            <a:r>
+              <a:rPr dirty="0"/>
+              <a:t> </a:t>
+            </a:r>
+            <a:r>
+              <a:rPr dirty="0" err="1"/>
+              <a:t>tamano</a:t>
+            </a:r>
+            <a:r>
+              <a:rPr dirty="0"/>
+              <a:t>.</a:t>
+            </a:r>
+          </a:p>
+          <a:p>
+            <a:pPr lvl="1">
+              <a:spcAft>
+                <a:spcPts val="400"/>
+              </a:spcAft>
+              <a:defRPr sz="1700">
+                <a:solidFill>
+                  <a:srgbClr val="666666"/>
+                </a:solidFill>
+                <a:latin typeface="Calibri"/>
+              </a:defRPr>
+            </a:pPr>
+            <a:r>
+              <a:rPr dirty="0"/>
+              <a:t>    </a:t>
+            </a:r>
+            <a:r>
+              <a:rPr dirty="0" err="1"/>
+              <a:t>Fundador</a:t>
+            </a:r>
+            <a:r>
+              <a:rPr dirty="0"/>
+              <a:t> </a:t>
+            </a:r>
+            <a:r>
+              <a:rPr dirty="0" err="1"/>
+              <a:t>dominante</a:t>
+            </a:r>
+            <a:r>
+              <a:rPr dirty="0"/>
+              <a:t>: </a:t>
+            </a:r>
+            <a:r>
+              <a:rPr dirty="0" err="1"/>
+              <a:t>evitar</a:t>
+            </a:r>
+            <a:r>
+              <a:rPr dirty="0"/>
+              <a:t> — </a:t>
+            </a:r>
+            <a:r>
+              <a:rPr dirty="0" err="1"/>
+              <a:t>replicaria</a:t>
+            </a:r>
+            <a:r>
+              <a:rPr dirty="0"/>
+              <a:t> </a:t>
+            </a:r>
+            <a:r>
+              <a:rPr dirty="0" err="1"/>
+              <a:t>el</a:t>
+            </a:r>
+            <a:r>
+              <a:rPr dirty="0"/>
+              <a:t> </a:t>
+            </a:r>
+            <a:r>
+              <a:rPr dirty="0" err="1"/>
+              <a:t>problema</a:t>
+            </a:r>
+            <a:r>
+              <a:rPr dirty="0"/>
+              <a:t> </a:t>
+            </a:r>
+            <a:r>
+              <a:rPr dirty="0" err="1"/>
+              <a:t>TradeLens</a:t>
+            </a:r>
+            <a:r>
+              <a:rPr dirty="0"/>
+              <a:t>.</a:t>
             </a:r>
           </a:p>
           <a:p>
@@ -3476,7 +3719,155 @@
               </a:defRPr>
             </a:pPr>
             <a:r>
-              <a:t>No es un tema tecnico: es un tema politico, legal y de negocio</a:t>
+              <a:rPr dirty="0"/>
+              <a:t>2. </a:t>
+            </a:r>
+            <a:r>
+              <a:rPr dirty="0" err="1"/>
+              <a:t>Politica</a:t>
+            </a:r>
+            <a:r>
+              <a:rPr dirty="0"/>
+              <a:t> de endorsement:</a:t>
+            </a:r>
+          </a:p>
+          <a:p>
+            <a:pPr lvl="1">
+              <a:spcAft>
+                <a:spcPts val="400"/>
+              </a:spcAft>
+              <a:defRPr sz="1700">
+                <a:solidFill>
+                  <a:srgbClr val="666666"/>
+                </a:solidFill>
+                <a:latin typeface="Calibri"/>
+              </a:defRPr>
+            </a:pPr>
+            <a:r>
+              <a:rPr dirty="0"/>
+              <a:t>    Lectura KYC: OR(</a:t>
+            </a:r>
+            <a:r>
+              <a:rPr dirty="0" err="1"/>
+              <a:t>banco_titular</a:t>
+            </a:r>
+            <a:r>
+              <a:rPr dirty="0"/>
+              <a:t>) — </a:t>
+            </a:r>
+            <a:r>
+              <a:rPr dirty="0" err="1"/>
+              <a:t>el</a:t>
+            </a:r>
+            <a:r>
+              <a:rPr dirty="0"/>
+              <a:t> banco del </a:t>
+            </a:r>
+            <a:r>
+              <a:rPr dirty="0" err="1"/>
+              <a:t>cliente</a:t>
+            </a:r>
+            <a:r>
+              <a:rPr dirty="0"/>
+              <a:t> basta.</a:t>
+            </a:r>
+          </a:p>
+          <a:p>
+            <a:pPr lvl="1">
+              <a:spcAft>
+                <a:spcPts val="400"/>
+              </a:spcAft>
+              <a:defRPr sz="1700">
+                <a:solidFill>
+                  <a:srgbClr val="666666"/>
+                </a:solidFill>
+                <a:latin typeface="Calibri"/>
+              </a:defRPr>
+            </a:pPr>
+            <a:r>
+              <a:rPr dirty="0"/>
+              <a:t>    </a:t>
+            </a:r>
+            <a:r>
+              <a:rPr dirty="0" err="1"/>
+              <a:t>Actualizar</a:t>
+            </a:r>
+            <a:r>
+              <a:rPr dirty="0"/>
+              <a:t> KYC: AND(</a:t>
+            </a:r>
+            <a:r>
+              <a:rPr dirty="0" err="1"/>
+              <a:t>banco_titular</a:t>
+            </a:r>
+            <a:r>
+              <a:rPr dirty="0"/>
+              <a:t>, </a:t>
+            </a:r>
+            <a:r>
+              <a:rPr dirty="0" err="1"/>
+              <a:t>banco_validador</a:t>
+            </a:r>
+            <a:r>
+              <a:rPr dirty="0"/>
+              <a:t>) — doble </a:t>
+            </a:r>
+            <a:r>
+              <a:rPr dirty="0" err="1"/>
+              <a:t>verificacion</a:t>
+            </a:r>
+            <a:r>
+              <a:rPr dirty="0"/>
+              <a:t>.</a:t>
+            </a:r>
+          </a:p>
+          <a:p>
+            <a:pPr lvl="1">
+              <a:spcAft>
+                <a:spcPts val="400"/>
+              </a:spcAft>
+              <a:defRPr sz="1700">
+                <a:solidFill>
+                  <a:srgbClr val="666666"/>
+                </a:solidFill>
+                <a:latin typeface="Calibri"/>
+              </a:defRPr>
+            </a:pPr>
+            <a:r>
+              <a:rPr dirty="0"/>
+              <a:t>    </a:t>
+            </a:r>
+            <a:r>
+              <a:rPr dirty="0" err="1"/>
+              <a:t>Cambios</a:t>
+            </a:r>
+            <a:r>
+              <a:rPr dirty="0"/>
+              <a:t> de </a:t>
+            </a:r>
+            <a:r>
+              <a:rPr dirty="0" err="1"/>
+              <a:t>politica</a:t>
+            </a:r>
+            <a:r>
+              <a:rPr dirty="0"/>
+              <a:t> del canal: MAJORITY de </a:t>
+            </a:r>
+            <a:r>
+              <a:rPr dirty="0" err="1"/>
+              <a:t>los</a:t>
+            </a:r>
+            <a:r>
+              <a:rPr dirty="0"/>
+              <a:t> 5 </a:t>
+            </a:r>
+            <a:r>
+              <a:rPr dirty="0" err="1"/>
+              <a:t>bancos</a:t>
+            </a:r>
+            <a:r>
+              <a:rPr dirty="0"/>
+              <a:t>.</a:t>
             </a:r>
           </a:p>
           <a:p>
@@ -3492,23 +3883,24 @@
               </a:defRPr>
             </a:pPr>
             <a:r>
-              <a:t>Si la gobernanza no esta clara desde el dia 1, el proyecto fracasara</a:t>
-            </a:r>
-          </a:p>
-          <a:p>
-            <a:pPr>
-              <a:spcAft>
-                <a:spcPts val="800"/>
-              </a:spcAft>
-              <a:defRPr sz="2000">
-                <a:solidFill>
-                  <a:srgbClr val="333333"/>
-                </a:solidFill>
-                <a:latin typeface="Calibri"/>
-              </a:defRPr>
-            </a:pPr>
-            <a:r>
-              <a:t>Preguntas que debe responder:</a:t>
+              <a:rPr dirty="0"/>
+              <a:t>3. ¿Quien opera </a:t>
+            </a:r>
+            <a:r>
+              <a:rPr dirty="0" err="1"/>
+              <a:t>los</a:t>
+            </a:r>
+            <a:r>
+              <a:rPr dirty="0"/>
+              <a:t> </a:t>
+            </a:r>
+            <a:r>
+              <a:rPr dirty="0" err="1"/>
+              <a:t>orderers</a:t>
+            </a:r>
+            <a:r>
+              <a:rPr dirty="0"/>
+              <a:t>?</a:t>
             </a:r>
           </a:p>
           <a:p>
@@ -3524,7 +3916,40 @@
               </a:defRPr>
             </a:pPr>
             <a:r>
-              <a:t>    ¿Quien puede unirse a la red? ¿Y quien puede ser expulsado?</a:t>
+              <a:rPr dirty="0"/>
+              <a:t>    </a:t>
+            </a:r>
+            <a:r>
+              <a:rPr dirty="0" err="1"/>
+              <a:t>Distribuidos</a:t>
+            </a:r>
+            <a:r>
+              <a:rPr dirty="0"/>
+              <a:t>: </a:t>
+            </a:r>
+            <a:r>
+              <a:rPr dirty="0" err="1"/>
+              <a:t>cada</a:t>
+            </a:r>
+            <a:r>
+              <a:rPr dirty="0"/>
+              <a:t> banco opera un </a:t>
+            </a:r>
+            <a:r>
+              <a:rPr dirty="0" err="1"/>
+              <a:t>nodo</a:t>
+            </a:r>
+            <a:r>
+              <a:rPr dirty="0"/>
+              <a:t> Raft (5 </a:t>
+            </a:r>
+            <a:r>
+              <a:rPr dirty="0" err="1"/>
+              <a:t>nodos</a:t>
+            </a:r>
+            <a:r>
+              <a:rPr dirty="0"/>
+              <a:t> total).</a:t>
             </a:r>
           </a:p>
           <a:p>
@@ -3540,7 +3965,32 @@
               </a:defRPr>
             </a:pPr>
             <a:r>
-              <a:t>    ¿Quien aprueba cambios en los chaincodes?</a:t>
+              <a:rPr dirty="0"/>
+              <a:t>    </a:t>
+            </a:r>
+            <a:r>
+              <a:rPr dirty="0" err="1"/>
+              <a:t>Ningun</a:t>
+            </a:r>
+            <a:r>
+              <a:rPr dirty="0"/>
+              <a:t> banco </a:t>
+            </a:r>
+            <a:r>
+              <a:rPr dirty="0" err="1"/>
+              <a:t>controla</a:t>
+            </a:r>
+            <a:r>
+              <a:rPr dirty="0"/>
+              <a:t> </a:t>
+            </a:r>
+            <a:r>
+              <a:rPr dirty="0" err="1"/>
+              <a:t>el</a:t>
+            </a:r>
+            <a:r>
+              <a:rPr dirty="0"/>
+              <a:t> ordering solo.</a:t>
             </a:r>
           </a:p>
           <a:p>
@@ -3556,44 +4006,50 @@
               </a:defRPr>
             </a:pPr>
             <a:r>
-              <a:t>    ¿Quien paga la infraestructura (orderers, CAs)?</a:t>
-            </a:r>
-          </a:p>
-          <a:p>
-            <a:pPr lvl="1">
-              <a:spcAft>
-                <a:spcPts val="400"/>
-              </a:spcAft>
-              <a:defRPr sz="1700">
-                <a:solidFill>
-                  <a:srgbClr val="666666"/>
-                </a:solidFill>
-                <a:latin typeface="Calibri"/>
-              </a:defRPr>
-            </a:pPr>
-            <a:r>
-              <a:t>    ¿Como se resuelven los conflictos?</a:t>
-            </a:r>
-          </a:p>
-          <a:p>
-            <a:pPr lvl="1">
-              <a:spcAft>
-                <a:spcPts val="400"/>
-              </a:spcAft>
-              <a:defRPr sz="1700">
-                <a:solidFill>
-                  <a:srgbClr val="666666"/>
-                </a:solidFill>
-                <a:latin typeface="Calibri"/>
-              </a:defRPr>
-            </a:pPr>
-            <a:r>
-              <a:t>    ¿Que pasa con los datos si una org abandona?</a:t>
+              <a:rPr dirty="0"/>
+              <a:t>    Alta </a:t>
+            </a:r>
+            <a:r>
+              <a:rPr dirty="0" err="1"/>
+              <a:t>disponibilidad</a:t>
+            </a:r>
+            <a:r>
+              <a:rPr dirty="0"/>
+              <a:t>: </a:t>
+            </a:r>
+            <a:r>
+              <a:rPr dirty="0" err="1"/>
+              <a:t>tolera</a:t>
+            </a:r>
+            <a:r>
+              <a:rPr dirty="0"/>
+              <a:t> 2 </a:t>
+            </a:r>
+            <a:r>
+              <a:rPr dirty="0" err="1"/>
+              <a:t>fallos</a:t>
+            </a:r>
+            <a:r>
+              <a:rPr dirty="0"/>
+              <a:t> </a:t>
+            </a:r>
+            <a:r>
+              <a:rPr dirty="0" err="1"/>
+              <a:t>simultaneos</a:t>
+            </a:r>
+            <a:r>
+              <a:rPr dirty="0"/>
+              <a:t>.</a:t>
             </a:r>
           </a:p>
         </p:txBody>
       </p:sp>
     </p:spTree>
+    <p:extLst>
+      <p:ext uri="{BB962C8B-B14F-4D97-AF65-F5344CB8AC3E}">
+        <p14:creationId xmlns:p14="http://schemas.microsoft.com/office/powerpoint/2010/main" val="3772050177"/>
+      </p:ext>
+    </p:extLst>
   </p:cSld>
   <p:clrMapOvr>
     <a:masterClrMapping/>
@@ -3601,8 +4057,8 @@
 </p:sld>
 </file>
 
-<file path=ppt/slides/slide3.xml><?xml version="1.0" encoding="utf-8"?>
-<p:sld xmlns:a="http://schemas.openxmlformats.org/drawingml/2006/main" xmlns:p="http://schemas.openxmlformats.org/presentationml/2006/main" xmlns:r="http://schemas.openxmlformats.org/officeDocument/2006/relationships">
+<file path=ppt/slides/slide11.xml><?xml version="1.0" encoding="utf-8"?>
+<p:sld xmlns:a="http://schemas.openxmlformats.org/drawingml/2006/main" xmlns:r="http://schemas.openxmlformats.org/officeDocument/2006/relationships" xmlns:p="http://schemas.openxmlformats.org/presentationml/2006/main">
   <p:cSld>
     <p:spTree>
       <p:nvGrpSpPr>
@@ -3610,7 +4066,14 @@
         <p:cNvGrpSpPr/>
         <p:nvPr/>
       </p:nvGrpSpPr>
-      <p:grpSpPr/>
+      <p:grpSpPr>
+        <a:xfrm>
+          <a:off x="0" y="0"/>
+          <a:ext cx="0" cy="0"/>
+          <a:chOff x="0" y="0"/>
+          <a:chExt cx="0" cy="0"/>
+        </a:xfrm>
+      </p:grpSpPr>
       <p:sp>
         <p:nvSpPr>
           <p:cNvPr id="2" name="Rectangle 1"/>
@@ -3651,6 +4114,7 @@
           <a:lstStyle/>
           <a:p>
             <a:pPr algn="ctr"/>
+            <a:endParaRPr/>
           </a:p>
         </p:txBody>
       </p:sp>
@@ -3683,7 +4147,7 @@
               </a:defRPr>
             </a:pPr>
             <a:r>
-              <a:t>Modelos de gobernanza</a:t>
+              <a:t>Respuestas al debate: gobernanza consorcio KYC</a:t>
             </a:r>
           </a:p>
         </p:txBody>
@@ -3728,6 +4192,7 @@
           <a:lstStyle/>
           <a:p>
             <a:pPr algn="ctr"/>
+            <a:endParaRPr/>
           </a:p>
         </p:txBody>
       </p:sp>
@@ -3740,7 +4205,7 @@
         <p:spPr>
           <a:xfrm>
             <a:off x="640080" y="1280160"/>
-            <a:ext cx="10515600" cy="5029200"/>
+            <a:ext cx="10515600" cy="3365024"/>
           </a:xfrm>
           <a:prstGeom prst="rect">
             <a:avLst/>
@@ -3765,7 +4230,148 @@
               </a:defRPr>
             </a:pPr>
             <a:r>
-              <a:t>Fundador dominante: una empresa crea la red y pone las reglas</a:t>
+              <a:rPr lang="es-ES" dirty="0"/>
+              <a:t>4. Como incorporar un nuevo banco:</a:t>
+            </a:r>
+          </a:p>
+          <a:p>
+            <a:pPr lvl="1">
+              <a:spcAft>
+                <a:spcPts val="400"/>
+              </a:spcAft>
+              <a:defRPr sz="1700">
+                <a:solidFill>
+                  <a:srgbClr val="666666"/>
+                </a:solidFill>
+                <a:latin typeface="Calibri"/>
+              </a:defRPr>
+            </a:pPr>
+            <a:r>
+              <a:rPr lang="es-ES" dirty="0"/>
+              <a:t>    </a:t>
+            </a:r>
+            <a:r>
+              <a:rPr lang="es-ES" dirty="0" err="1"/>
+              <a:t>Evaluacion</a:t>
+            </a:r>
+            <a:r>
+              <a:rPr lang="es-ES" dirty="0"/>
+              <a:t> por </a:t>
+            </a:r>
+            <a:r>
+              <a:rPr lang="es-ES" dirty="0" err="1"/>
+              <a:t>comite</a:t>
+            </a:r>
+            <a:r>
+              <a:rPr lang="es-ES" dirty="0"/>
+              <a:t> (sistemas, </a:t>
+            </a:r>
+            <a:r>
+              <a:rPr lang="es-ES" dirty="0" err="1"/>
+              <a:t>regulacion</a:t>
+            </a:r>
+            <a:r>
+              <a:rPr lang="es-ES" dirty="0"/>
+              <a:t>, solvencia).</a:t>
+            </a:r>
+          </a:p>
+          <a:p>
+            <a:pPr lvl="1">
+              <a:spcAft>
+                <a:spcPts val="400"/>
+              </a:spcAft>
+              <a:defRPr sz="1700">
+                <a:solidFill>
+                  <a:srgbClr val="666666"/>
+                </a:solidFill>
+                <a:latin typeface="Calibri"/>
+              </a:defRPr>
+            </a:pPr>
+            <a:r>
+              <a:rPr lang="es-ES" dirty="0"/>
+              <a:t>    </a:t>
+            </a:r>
+            <a:r>
+              <a:rPr lang="es-ES" dirty="0" err="1"/>
+              <a:t>Aprobacion</a:t>
+            </a:r>
+            <a:r>
+              <a:rPr lang="es-ES" dirty="0"/>
+              <a:t> formal: MAJORITY de los 5 bancos existentes.</a:t>
+            </a:r>
+          </a:p>
+          <a:p>
+            <a:pPr lvl="1">
+              <a:spcAft>
+                <a:spcPts val="400"/>
+              </a:spcAft>
+              <a:defRPr sz="1700">
+                <a:solidFill>
+                  <a:srgbClr val="666666"/>
+                </a:solidFill>
+                <a:latin typeface="Calibri"/>
+              </a:defRPr>
+            </a:pPr>
+            <a:r>
+              <a:rPr lang="es-ES" dirty="0"/>
+              <a:t>    </a:t>
+            </a:r>
+            <a:r>
+              <a:rPr lang="es-ES" dirty="0" err="1"/>
+              <a:t>Onboarding</a:t>
+            </a:r>
+            <a:r>
+              <a:rPr lang="es-ES" dirty="0"/>
+              <a:t> </a:t>
+            </a:r>
+            <a:r>
+              <a:rPr lang="es-ES" dirty="0" err="1"/>
+              <a:t>tecnico</a:t>
+            </a:r>
+            <a:r>
+              <a:rPr lang="es-ES" dirty="0"/>
+              <a:t>: emitir </a:t>
+            </a:r>
+            <a:r>
+              <a:rPr lang="es-ES" dirty="0" err="1"/>
+              <a:t>certs</a:t>
+            </a:r>
+            <a:r>
+              <a:rPr lang="es-ES" dirty="0"/>
+              <a:t>, unir al canal, instalar </a:t>
+            </a:r>
+            <a:r>
+              <a:rPr lang="es-ES" dirty="0" err="1"/>
+              <a:t>chaincode</a:t>
+            </a:r>
+            <a:r>
+              <a:rPr lang="es-ES" dirty="0"/>
+              <a:t>.</a:t>
+            </a:r>
+          </a:p>
+          <a:p>
+            <a:pPr lvl="1">
+              <a:spcAft>
+                <a:spcPts val="400"/>
+              </a:spcAft>
+              <a:defRPr sz="1700">
+                <a:solidFill>
+                  <a:srgbClr val="666666"/>
+                </a:solidFill>
+                <a:latin typeface="Calibri"/>
+              </a:defRPr>
+            </a:pPr>
+            <a:r>
+              <a:rPr lang="es-ES" dirty="0"/>
+              <a:t>    Cuota escalada: paga proporcional a su </a:t>
+            </a:r>
+            <a:r>
+              <a:rPr lang="es-ES" dirty="0" err="1"/>
+              <a:t>tamano</a:t>
+            </a:r>
+            <a:r>
+              <a:rPr lang="es-ES" dirty="0"/>
+              <a:t>.</a:t>
             </a:r>
           </a:p>
           <a:p>
@@ -3781,145 +4387,84 @@
               </a:defRPr>
             </a:pPr>
             <a:r>
-              <a:t>  Ejemplo: Walmart Food Trust. Walmart decide, los proveedores acatan</a:t>
-            </a:r>
-          </a:p>
-          <a:p>
-            <a:pPr>
-              <a:spcAft>
-                <a:spcPts val="800"/>
-              </a:spcAft>
-              <a:defRPr sz="2000">
-                <a:solidFill>
-                  <a:srgbClr val="333333"/>
-                </a:solidFill>
-                <a:latin typeface="Calibri"/>
-              </a:defRPr>
-            </a:pPr>
-            <a:r>
-              <a:t>  Pro: rapido de arrancar. Contra: los demas desconfian</a:t>
-            </a:r>
-          </a:p>
-          <a:p>
-            <a:pPr>
-              <a:spcAft>
-                <a:spcPts val="800"/>
-              </a:spcAft>
-              <a:defRPr sz="2000">
-                <a:solidFill>
-                  <a:srgbClr val="333333"/>
-                </a:solidFill>
-                <a:latin typeface="Calibri"/>
-              </a:defRPr>
-            </a:pPr>
-          </a:p>
-          <a:p>
-            <a:pPr>
-              <a:spcAft>
-                <a:spcPts val="800"/>
-              </a:spcAft>
-              <a:defRPr sz="2000">
-                <a:solidFill>
-                  <a:srgbClr val="333333"/>
-                </a:solidFill>
-                <a:latin typeface="Calibri"/>
-              </a:defRPr>
-            </a:pPr>
-            <a:r>
-              <a:t>Democratico: todas las orgs tienen el mismo voto</a:t>
-            </a:r>
-          </a:p>
-          <a:p>
-            <a:pPr>
-              <a:spcAft>
-                <a:spcPts val="800"/>
-              </a:spcAft>
-              <a:defRPr sz="2000">
-                <a:solidFill>
-                  <a:srgbClr val="333333"/>
-                </a:solidFill>
-                <a:latin typeface="Calibri"/>
-              </a:defRPr>
-            </a:pPr>
-            <a:r>
-              <a:t>  Ejemplo: Alastria. Cada miembro un voto en la asamblea</a:t>
-            </a:r>
-          </a:p>
-          <a:p>
-            <a:pPr>
-              <a:spcAft>
-                <a:spcPts val="800"/>
-              </a:spcAft>
-              <a:defRPr sz="2000">
-                <a:solidFill>
-                  <a:srgbClr val="333333"/>
-                </a:solidFill>
-                <a:latin typeface="Calibri"/>
-              </a:defRPr>
-            </a:pPr>
-            <a:r>
-              <a:t>  Pro: equitativo. Contra: lento, dificil llegar a acuerdos</a:t>
-            </a:r>
-          </a:p>
-          <a:p>
-            <a:pPr>
-              <a:spcAft>
-                <a:spcPts val="800"/>
-              </a:spcAft>
-              <a:defRPr sz="2000">
-                <a:solidFill>
-                  <a:srgbClr val="333333"/>
-                </a:solidFill>
-                <a:latin typeface="Calibri"/>
-              </a:defRPr>
-            </a:pPr>
-          </a:p>
-          <a:p>
-            <a:pPr>
-              <a:spcAft>
-                <a:spcPts val="800"/>
-              </a:spcAft>
-              <a:defRPr sz="2000">
-                <a:solidFill>
-                  <a:srgbClr val="333333"/>
-                </a:solidFill>
-                <a:latin typeface="Calibri"/>
-              </a:defRPr>
-            </a:pPr>
-            <a:r>
-              <a:t>Federado: un comite tecnico/ejecutivo toma las decisiones operativas</a:t>
-            </a:r>
-          </a:p>
-          <a:p>
-            <a:pPr>
-              <a:spcAft>
-                <a:spcPts val="800"/>
-              </a:spcAft>
-              <a:defRPr sz="2000">
-                <a:solidFill>
-                  <a:srgbClr val="333333"/>
-                </a:solidFill>
-                <a:latin typeface="Calibri"/>
-              </a:defRPr>
-            </a:pPr>
-            <a:r>
-              <a:t>  Ejemplo: EBSI. La EBP decide la estrategia, los estados operan</a:t>
-            </a:r>
-          </a:p>
-          <a:p>
-            <a:pPr>
-              <a:spcAft>
-                <a:spcPts val="800"/>
-              </a:spcAft>
-              <a:defRPr sz="2000">
-                <a:solidFill>
-                  <a:srgbClr val="333333"/>
-                </a:solidFill>
-                <a:latin typeface="Calibri"/>
-              </a:defRPr>
-            </a:pPr>
-            <a:r>
-              <a:t>  Pro: agil. Contra: el comite puede desconectarse de los miembros</a:t>
+              <a:rPr lang="es-ES" dirty="0"/>
+              <a:t>5. Que pasa si un banco quiere salir:</a:t>
+            </a:r>
+          </a:p>
+          <a:p>
+            <a:pPr lvl="1">
+              <a:spcAft>
+                <a:spcPts val="400"/>
+              </a:spcAft>
+              <a:defRPr sz="1700">
+                <a:solidFill>
+                  <a:srgbClr val="666666"/>
+                </a:solidFill>
+                <a:latin typeface="Calibri"/>
+              </a:defRPr>
+            </a:pPr>
+            <a:r>
+              <a:rPr lang="es-ES" dirty="0"/>
+              <a:t>    Datos KYC ya registrados: inmutables, no se pueden borrar.</a:t>
+            </a:r>
+          </a:p>
+          <a:p>
+            <a:pPr lvl="1">
+              <a:spcAft>
+                <a:spcPts val="400"/>
+              </a:spcAft>
+              <a:defRPr sz="1700">
+                <a:solidFill>
+                  <a:srgbClr val="666666"/>
+                </a:solidFill>
+                <a:latin typeface="Calibri"/>
+              </a:defRPr>
+            </a:pPr>
+            <a:r>
+              <a:rPr lang="es-ES" dirty="0"/>
+              <a:t>    Su certificado se revoca (CRL) — no puede leer ni escribir.</a:t>
+            </a:r>
+          </a:p>
+          <a:p>
+            <a:pPr lvl="1">
+              <a:spcAft>
+                <a:spcPts val="400"/>
+              </a:spcAft>
+              <a:defRPr sz="1700">
+                <a:solidFill>
+                  <a:srgbClr val="666666"/>
+                </a:solidFill>
+                <a:latin typeface="Calibri"/>
+              </a:defRPr>
+            </a:pPr>
+            <a:r>
+              <a:rPr lang="es-ES" dirty="0"/>
+              <a:t>    Los clientes del banco migran a otro banco del consorcio o salen del sistema.</a:t>
+            </a:r>
+          </a:p>
+          <a:p>
+            <a:pPr lvl="1">
+              <a:spcAft>
+                <a:spcPts val="400"/>
+              </a:spcAft>
+              <a:defRPr sz="1700">
+                <a:solidFill>
+                  <a:srgbClr val="666666"/>
+                </a:solidFill>
+                <a:latin typeface="Calibri"/>
+              </a:defRPr>
+            </a:pPr>
+            <a:r>
+              <a:rPr lang="es-ES" dirty="0"/>
+              <a:t>    Responsabilidad legal por datos antiguos queda </a:t>
+            </a:r>
+            <a:r>
+              <a:rPr lang="es-ES" dirty="0" err="1"/>
+              <a:t>segun</a:t>
+            </a:r>
+            <a:r>
+              <a:rPr lang="es-ES" dirty="0"/>
+              <a:t> el acuerdo del consorcio.</a:t>
             </a:r>
           </a:p>
         </p:txBody>
@@ -3932,8 +4477,8 @@
 </p:sld>
 </file>
 
-<file path=ppt/slides/slide4.xml><?xml version="1.0" encoding="utf-8"?>
-<p:sld xmlns:a="http://schemas.openxmlformats.org/drawingml/2006/main" xmlns:p="http://schemas.openxmlformats.org/presentationml/2006/main" xmlns:r="http://schemas.openxmlformats.org/officeDocument/2006/relationships">
+<file path=ppt/slides/slide12.xml><?xml version="1.0" encoding="utf-8"?>
+<p:sld xmlns:a="http://schemas.openxmlformats.org/drawingml/2006/main" xmlns:r="http://schemas.openxmlformats.org/officeDocument/2006/relationships" xmlns:p="http://schemas.openxmlformats.org/presentationml/2006/main">
   <p:cSld>
     <p:spTree>
       <p:nvGrpSpPr>
@@ -3941,7 +4486,14 @@
         <p:cNvGrpSpPr/>
         <p:nvPr/>
       </p:nvGrpSpPr>
-      <p:grpSpPr/>
+      <p:grpSpPr>
+        <a:xfrm>
+          <a:off x="0" y="0"/>
+          <a:ext cx="0" cy="0"/>
+          <a:chOff x="0" y="0"/>
+          <a:chExt cx="0" cy="0"/>
+        </a:xfrm>
+      </p:grpSpPr>
       <p:sp>
         <p:nvSpPr>
           <p:cNvPr id="2" name="Rectangle 1"/>
@@ -3982,6 +4534,7 @@
           <a:lstStyle/>
           <a:p>
             <a:pPr algn="ctr"/>
+            <a:endParaRPr/>
           </a:p>
         </p:txBody>
       </p:sp>
@@ -4014,7 +4567,7 @@
               </a:defRPr>
             </a:pPr>
             <a:r>
-              <a:t>Gobernanza en Fabric: las politicas como herramienta</a:t>
+              <a:t>Respuestas al repaso</a:t>
             </a:r>
           </a:p>
         </p:txBody>
@@ -4059,6 +4612,7 @@
           <a:lstStyle/>
           <a:p>
             <a:pPr algn="ctr"/>
+            <a:endParaRPr/>
           </a:p>
         </p:txBody>
       </p:sp>
@@ -4071,7 +4625,7 @@
         <p:spPr>
           <a:xfrm>
             <a:off x="640080" y="1280160"/>
-            <a:ext cx="10515600" cy="5029200"/>
+            <a:ext cx="10515600" cy="4401205"/>
           </a:xfrm>
           <a:prstGeom prst="rect">
             <a:avLst/>
@@ -4096,7 +4650,259 @@
               </a:defRPr>
             </a:pPr>
             <a:r>
-              <a:t>Fabric codifica la gobernanza directamente en la configuracion del canal:</a:t>
+              <a:rPr dirty="0"/>
+              <a:t>1. </a:t>
+            </a:r>
+            <a:r>
+              <a:rPr dirty="0" err="1"/>
+              <a:t>Gobernanza</a:t>
+            </a:r>
+            <a:r>
+              <a:rPr dirty="0"/>
+              <a:t> y </a:t>
+            </a:r>
+            <a:r>
+              <a:rPr dirty="0" err="1"/>
+              <a:t>por</a:t>
+            </a:r>
+            <a:r>
+              <a:rPr dirty="0"/>
+              <a:t> </a:t>
+            </a:r>
+            <a:r>
+              <a:rPr dirty="0" err="1"/>
+              <a:t>que</a:t>
+            </a:r>
+            <a:r>
+              <a:rPr dirty="0"/>
+              <a:t> es </a:t>
+            </a:r>
+            <a:r>
+              <a:rPr dirty="0" err="1"/>
+              <a:t>critica</a:t>
+            </a:r>
+            <a:r>
+              <a:rPr dirty="0"/>
+              <a:t>:</a:t>
+            </a:r>
+          </a:p>
+          <a:p>
+            <a:pPr lvl="1">
+              <a:spcAft>
+                <a:spcPts val="400"/>
+              </a:spcAft>
+              <a:defRPr sz="1700">
+                <a:solidFill>
+                  <a:srgbClr val="666666"/>
+                </a:solidFill>
+                <a:latin typeface="Calibri"/>
+              </a:defRPr>
+            </a:pPr>
+            <a:r>
+              <a:rPr dirty="0"/>
+              <a:t>    Conjunto de </a:t>
+            </a:r>
+            <a:r>
+              <a:rPr dirty="0" err="1"/>
+              <a:t>reglas</a:t>
+            </a:r>
+            <a:r>
+              <a:rPr dirty="0"/>
+              <a:t> </a:t>
+            </a:r>
+            <a:r>
+              <a:rPr dirty="0" err="1"/>
+              <a:t>que</a:t>
+            </a:r>
+            <a:r>
+              <a:rPr dirty="0"/>
+              <a:t> </a:t>
+            </a:r>
+            <a:r>
+              <a:rPr dirty="0" err="1"/>
+              <a:t>definen</a:t>
+            </a:r>
+            <a:r>
+              <a:rPr dirty="0"/>
+              <a:t> </a:t>
+            </a:r>
+            <a:r>
+              <a:rPr dirty="0" err="1"/>
+              <a:t>como</a:t>
+            </a:r>
+            <a:r>
+              <a:rPr dirty="0"/>
+              <a:t> se toman </a:t>
+            </a:r>
+            <a:r>
+              <a:rPr dirty="0" err="1"/>
+              <a:t>decisiones</a:t>
+            </a:r>
+            <a:r>
+              <a:rPr dirty="0"/>
+              <a:t> </a:t>
+            </a:r>
+            <a:r>
+              <a:rPr dirty="0" err="1"/>
+              <a:t>en</a:t>
+            </a:r>
+            <a:r>
+              <a:rPr dirty="0"/>
+              <a:t> la red.</a:t>
+            </a:r>
+          </a:p>
+          <a:p>
+            <a:pPr lvl="1">
+              <a:spcAft>
+                <a:spcPts val="400"/>
+              </a:spcAft>
+              <a:defRPr sz="1700">
+                <a:solidFill>
+                  <a:srgbClr val="666666"/>
+                </a:solidFill>
+                <a:latin typeface="Calibri"/>
+              </a:defRPr>
+            </a:pPr>
+            <a:r>
+              <a:rPr dirty="0"/>
+              <a:t>    Sin </a:t>
+            </a:r>
+            <a:r>
+              <a:rPr dirty="0" err="1"/>
+              <a:t>ella</a:t>
+            </a:r>
+            <a:r>
+              <a:rPr dirty="0"/>
+              <a:t>, no hay </a:t>
+            </a:r>
+            <a:r>
+              <a:rPr dirty="0" err="1"/>
+              <a:t>consenso</a:t>
+            </a:r>
+            <a:r>
+              <a:rPr dirty="0"/>
+              <a:t> </a:t>
+            </a:r>
+            <a:r>
+              <a:rPr dirty="0" err="1"/>
+              <a:t>sobre</a:t>
+            </a:r>
+            <a:r>
+              <a:rPr dirty="0"/>
+              <a:t> </a:t>
+            </a:r>
+            <a:r>
+              <a:rPr dirty="0" err="1"/>
+              <a:t>cambios</a:t>
+            </a:r>
+            <a:r>
+              <a:rPr dirty="0"/>
+              <a:t> y </a:t>
+            </a:r>
+            <a:r>
+              <a:rPr dirty="0" err="1"/>
+              <a:t>el</a:t>
+            </a:r>
+            <a:r>
+              <a:rPr dirty="0"/>
+              <a:t> </a:t>
+            </a:r>
+            <a:r>
+              <a:rPr dirty="0" err="1"/>
+              <a:t>consorcio</a:t>
+            </a:r>
+            <a:r>
+              <a:rPr dirty="0"/>
+              <a:t> se </a:t>
+            </a:r>
+            <a:r>
+              <a:rPr dirty="0" err="1"/>
+              <a:t>paraliza</a:t>
+            </a:r>
+            <a:r>
+              <a:rPr dirty="0"/>
+              <a:t>.</a:t>
+            </a:r>
+          </a:p>
+          <a:p>
+            <a:pPr lvl="1">
+              <a:spcAft>
+                <a:spcPts val="400"/>
+              </a:spcAft>
+              <a:defRPr sz="1700">
+                <a:solidFill>
+                  <a:srgbClr val="666666"/>
+                </a:solidFill>
+                <a:latin typeface="Calibri"/>
+              </a:defRPr>
+            </a:pPr>
+            <a:r>
+              <a:rPr dirty="0"/>
+              <a:t>    </a:t>
+            </a:r>
+            <a:r>
+              <a:rPr dirty="0" err="1"/>
+              <a:t>Proyectos</a:t>
+            </a:r>
+            <a:r>
+              <a:rPr dirty="0"/>
+              <a:t> </a:t>
+            </a:r>
+            <a:r>
+              <a:rPr dirty="0" err="1"/>
+              <a:t>como</a:t>
+            </a:r>
+            <a:r>
+              <a:rPr dirty="0"/>
+              <a:t> </a:t>
+            </a:r>
+            <a:r>
+              <a:rPr dirty="0" err="1"/>
+              <a:t>TradeLens</a:t>
+            </a:r>
+            <a:r>
+              <a:rPr dirty="0"/>
+              <a:t> </a:t>
+            </a:r>
+            <a:r>
+              <a:rPr dirty="0" err="1"/>
+              <a:t>cerraron</a:t>
+            </a:r>
+            <a:r>
+              <a:rPr dirty="0"/>
+              <a:t> </a:t>
+            </a:r>
+            <a:r>
+              <a:rPr dirty="0" err="1"/>
+              <a:t>por</a:t>
+            </a:r>
+            <a:r>
+              <a:rPr dirty="0"/>
+              <a:t> </a:t>
+            </a:r>
+            <a:r>
+              <a:rPr dirty="0" err="1"/>
+              <a:t>falla</a:t>
+            </a:r>
+            <a:r>
+              <a:rPr dirty="0"/>
+              <a:t> de </a:t>
+            </a:r>
+            <a:r>
+              <a:rPr dirty="0" err="1"/>
+              <a:t>gobernanza</a:t>
+            </a:r>
+            <a:r>
+              <a:rPr dirty="0"/>
+              <a:t>, no </a:t>
+            </a:r>
+            <a:r>
+              <a:rPr dirty="0" err="1"/>
+              <a:t>tecnologia</a:t>
+            </a:r>
+            <a:r>
+              <a:rPr dirty="0"/>
+              <a:t>.</a:t>
             </a:r>
           </a:p>
           <a:p>
@@ -4111,6 +4917,197 @@
                 <a:latin typeface="Calibri"/>
               </a:defRPr>
             </a:pPr>
+            <a:r>
+              <a:rPr dirty="0"/>
+              <a:t>2. Tres </a:t>
+            </a:r>
+            <a:r>
+              <a:rPr dirty="0" err="1"/>
+              <a:t>modelos</a:t>
+            </a:r>
+            <a:r>
+              <a:rPr dirty="0"/>
+              <a:t> de </a:t>
+            </a:r>
+            <a:r>
+              <a:rPr dirty="0" err="1"/>
+              <a:t>gobernanza</a:t>
+            </a:r>
+            <a:r>
+              <a:rPr dirty="0"/>
+              <a:t> + </a:t>
+            </a:r>
+            <a:r>
+              <a:rPr dirty="0" err="1"/>
+              <a:t>ejemplo</a:t>
+            </a:r>
+            <a:r>
+              <a:rPr dirty="0"/>
+              <a:t>:</a:t>
+            </a:r>
+          </a:p>
+          <a:p>
+            <a:pPr lvl="1">
+              <a:spcAft>
+                <a:spcPts val="400"/>
+              </a:spcAft>
+              <a:defRPr sz="1700">
+                <a:solidFill>
+                  <a:srgbClr val="666666"/>
+                </a:solidFill>
+                <a:latin typeface="Calibri"/>
+              </a:defRPr>
+            </a:pPr>
+            <a:r>
+              <a:rPr dirty="0"/>
+              <a:t>    </a:t>
+            </a:r>
+            <a:r>
+              <a:rPr dirty="0" err="1"/>
+              <a:t>Fundador</a:t>
+            </a:r>
+            <a:r>
+              <a:rPr dirty="0"/>
+              <a:t> </a:t>
+            </a:r>
+            <a:r>
+              <a:rPr dirty="0" err="1"/>
+              <a:t>dominante</a:t>
+            </a:r>
+            <a:r>
+              <a:rPr dirty="0"/>
+              <a:t>: Walmart Food Trust (Walmart </a:t>
+            </a:r>
+            <a:r>
+              <a:rPr dirty="0" err="1"/>
+              <a:t>impone</a:t>
+            </a:r>
+            <a:r>
+              <a:rPr dirty="0"/>
+              <a:t>).</a:t>
+            </a:r>
+          </a:p>
+          <a:p>
+            <a:pPr lvl="1">
+              <a:spcAft>
+                <a:spcPts val="400"/>
+              </a:spcAft>
+              <a:defRPr sz="1700">
+                <a:solidFill>
+                  <a:srgbClr val="666666"/>
+                </a:solidFill>
+                <a:latin typeface="Calibri"/>
+              </a:defRPr>
+            </a:pPr>
+            <a:r>
+              <a:rPr dirty="0"/>
+              <a:t>    Democratico: </a:t>
+            </a:r>
+            <a:r>
+              <a:rPr dirty="0" err="1"/>
+              <a:t>Alastria</a:t>
+            </a:r>
+            <a:r>
+              <a:rPr dirty="0"/>
+              <a:t> (</a:t>
+            </a:r>
+            <a:r>
+              <a:rPr dirty="0" err="1"/>
+              <a:t>cada</a:t>
+            </a:r>
+            <a:r>
+              <a:rPr dirty="0"/>
+              <a:t> </a:t>
+            </a:r>
+            <a:r>
+              <a:rPr dirty="0" err="1"/>
+              <a:t>miembro</a:t>
+            </a:r>
+            <a:r>
+              <a:rPr dirty="0"/>
+              <a:t> un </a:t>
+            </a:r>
+            <a:r>
+              <a:rPr dirty="0" err="1"/>
+              <a:t>voto</a:t>
+            </a:r>
+            <a:r>
+              <a:rPr dirty="0"/>
+              <a:t> </a:t>
+            </a:r>
+            <a:r>
+              <a:rPr dirty="0" err="1"/>
+              <a:t>en</a:t>
+            </a:r>
+            <a:r>
+              <a:rPr dirty="0"/>
+              <a:t> </a:t>
+            </a:r>
+            <a:r>
+              <a:rPr dirty="0" err="1"/>
+              <a:t>asamblea</a:t>
+            </a:r>
+            <a:r>
+              <a:rPr dirty="0"/>
+              <a:t>).</a:t>
+            </a:r>
+          </a:p>
+          <a:p>
+            <a:pPr lvl="1">
+              <a:spcAft>
+                <a:spcPts val="400"/>
+              </a:spcAft>
+              <a:defRPr sz="1700">
+                <a:solidFill>
+                  <a:srgbClr val="666666"/>
+                </a:solidFill>
+                <a:latin typeface="Calibri"/>
+              </a:defRPr>
+            </a:pPr>
+            <a:r>
+              <a:rPr dirty="0"/>
+              <a:t>    </a:t>
+            </a:r>
+            <a:r>
+              <a:rPr dirty="0" err="1"/>
+              <a:t>Federado</a:t>
+            </a:r>
+            <a:r>
+              <a:rPr dirty="0"/>
+              <a:t>: EBSI (</a:t>
+            </a:r>
+            <a:r>
+              <a:rPr dirty="0" err="1"/>
+              <a:t>comite</a:t>
+            </a:r>
+            <a:r>
+              <a:rPr dirty="0"/>
+              <a:t> </a:t>
+            </a:r>
+            <a:r>
+              <a:rPr dirty="0" err="1"/>
+              <a:t>ejecutivo</a:t>
+            </a:r>
+            <a:r>
+              <a:rPr dirty="0"/>
+              <a:t> </a:t>
+            </a:r>
+            <a:r>
+              <a:rPr dirty="0" err="1"/>
+              <a:t>rotativo</a:t>
+            </a:r>
+            <a:r>
+              <a:rPr dirty="0"/>
+              <a:t> entre </a:t>
+            </a:r>
+            <a:r>
+              <a:rPr dirty="0" err="1"/>
+              <a:t>miembros</a:t>
+            </a:r>
+            <a:r>
+              <a:rPr dirty="0"/>
+              <a:t>).</a:t>
+            </a:r>
           </a:p>
           <a:p>
             <a:pPr>
@@ -4125,158 +5122,196 @@
               </a:defRPr>
             </a:pPr>
             <a:r>
-              <a:t>Politicas de canal: quien puede leer, escribir, administrar</a:t>
-            </a:r>
-          </a:p>
-          <a:p>
-            <a:pPr>
-              <a:spcAft>
-                <a:spcPts val="800"/>
-              </a:spcAft>
-              <a:defRPr sz="2000">
-                <a:solidFill>
-                  <a:srgbClr val="333333"/>
-                </a:solidFill>
-                <a:latin typeface="Calibri"/>
-              </a:defRPr>
-            </a:pPr>
-            <a:r>
-              <a:t>  MAJORITY Admins: la mayoria de orgs deben aprobar cambios</a:t>
-            </a:r>
-          </a:p>
-          <a:p>
-            <a:pPr>
-              <a:spcAft>
-                <a:spcPts val="800"/>
-              </a:spcAft>
-              <a:defRPr sz="2000">
-                <a:solidFill>
-                  <a:srgbClr val="333333"/>
-                </a:solidFill>
-                <a:latin typeface="Calibri"/>
-              </a:defRPr>
-            </a:pPr>
-            <a:r>
-              <a:t>  ALL Admins: unanimidad requerida</a:t>
-            </a:r>
-          </a:p>
-          <a:p>
-            <a:pPr>
-              <a:spcAft>
-                <a:spcPts val="800"/>
-              </a:spcAft>
-              <a:defRPr sz="2000">
-                <a:solidFill>
-                  <a:srgbClr val="333333"/>
-                </a:solidFill>
-                <a:latin typeface="Calibri"/>
-              </a:defRPr>
-            </a:pPr>
-          </a:p>
-          <a:p>
-            <a:pPr>
-              <a:spcAft>
-                <a:spcPts val="800"/>
-              </a:spcAft>
-              <a:defRPr sz="2000">
-                <a:solidFill>
-                  <a:srgbClr val="333333"/>
-                </a:solidFill>
-                <a:latin typeface="Calibri"/>
-              </a:defRPr>
-            </a:pPr>
-            <a:r>
-              <a:t>Politicas de endorsement: quien valida cada transaccion</a:t>
-            </a:r>
-          </a:p>
-          <a:p>
-            <a:pPr>
-              <a:spcAft>
-                <a:spcPts val="800"/>
-              </a:spcAft>
-              <a:defRPr sz="2000">
-                <a:solidFill>
-                  <a:srgbClr val="333333"/>
-                </a:solidFill>
-                <a:latin typeface="Calibri"/>
-              </a:defRPr>
-            </a:pPr>
-            <a:r>
-              <a:t>  AND(Org1, Org2): ambas deben aprobar</a:t>
-            </a:r>
-          </a:p>
-          <a:p>
-            <a:pPr>
-              <a:spcAft>
-                <a:spcPts val="800"/>
-              </a:spcAft>
-              <a:defRPr sz="2000">
-                <a:solidFill>
-                  <a:srgbClr val="333333"/>
-                </a:solidFill>
-                <a:latin typeface="Calibri"/>
-              </a:defRPr>
-            </a:pPr>
-            <a:r>
-              <a:t>  OR(Org1, Org2): basta con una</a:t>
-            </a:r>
-          </a:p>
-          <a:p>
-            <a:pPr>
-              <a:spcAft>
-                <a:spcPts val="800"/>
-              </a:spcAft>
-              <a:defRPr sz="2000">
-                <a:solidFill>
-                  <a:srgbClr val="333333"/>
-                </a:solidFill>
-                <a:latin typeface="Calibri"/>
-              </a:defRPr>
-            </a:pPr>
-          </a:p>
-          <a:p>
-            <a:pPr>
-              <a:spcAft>
-                <a:spcPts val="800"/>
-              </a:spcAft>
-              <a:defRPr sz="2000">
-                <a:solidFill>
-                  <a:srgbClr val="333333"/>
-                </a:solidFill>
-                <a:latin typeface="Calibri"/>
-              </a:defRPr>
-            </a:pPr>
-            <a:r>
-              <a:t>Lifecycle: aprobar chaincodes requiere mayoria de orgs</a:t>
-            </a:r>
-          </a:p>
-          <a:p>
-            <a:pPr>
-              <a:spcAft>
-                <a:spcPts val="800"/>
-              </a:spcAft>
-              <a:defRPr sz="2000">
-                <a:solidFill>
-                  <a:srgbClr val="333333"/>
-                </a:solidFill>
-                <a:latin typeface="Calibri"/>
-              </a:defRPr>
-            </a:pPr>
-          </a:p>
-          <a:p>
-            <a:pPr>
-              <a:spcAft>
-                <a:spcPts val="800"/>
-              </a:spcAft>
-              <a:defRPr sz="2000">
-                <a:solidFill>
-                  <a:srgbClr val="333333"/>
-                </a:solidFill>
-                <a:latin typeface="Calibri"/>
-              </a:defRPr>
-            </a:pPr>
-            <a:r>
-              <a:t>Las politicas de Fabric son gobernanza ejecutable: no son un documento, son codigo.</a:t>
+              <a:rPr dirty="0"/>
+              <a:t>3. ¿Como </a:t>
+            </a:r>
+            <a:r>
+              <a:rPr dirty="0" err="1"/>
+              <a:t>codifica</a:t>
+            </a:r>
+            <a:r>
+              <a:rPr dirty="0"/>
+              <a:t> Fabric la </a:t>
+            </a:r>
+            <a:r>
+              <a:rPr dirty="0" err="1"/>
+              <a:t>gobernanza</a:t>
+            </a:r>
+            <a:r>
+              <a:rPr dirty="0"/>
+              <a:t>?</a:t>
+            </a:r>
+          </a:p>
+          <a:p>
+            <a:pPr lvl="1">
+              <a:spcAft>
+                <a:spcPts val="400"/>
+              </a:spcAft>
+              <a:defRPr sz="1700">
+                <a:solidFill>
+                  <a:srgbClr val="666666"/>
+                </a:solidFill>
+                <a:latin typeface="Calibri"/>
+              </a:defRPr>
+            </a:pPr>
+            <a:r>
+              <a:rPr dirty="0"/>
+              <a:t>    </a:t>
+            </a:r>
+            <a:r>
+              <a:rPr dirty="0" err="1"/>
+              <a:t>Politicas</a:t>
+            </a:r>
+            <a:r>
+              <a:rPr dirty="0"/>
+              <a:t> de canal (MAJORITY Admins, </a:t>
+            </a:r>
+            <a:r>
+              <a:rPr dirty="0" err="1"/>
+              <a:t>etc</a:t>
+            </a:r>
+            <a:r>
+              <a:rPr dirty="0"/>
+              <a:t>).</a:t>
+            </a:r>
+          </a:p>
+          <a:p>
+            <a:pPr lvl="1">
+              <a:spcAft>
+                <a:spcPts val="400"/>
+              </a:spcAft>
+              <a:defRPr sz="1700">
+                <a:solidFill>
+                  <a:srgbClr val="666666"/>
+                </a:solidFill>
+                <a:latin typeface="Calibri"/>
+              </a:defRPr>
+            </a:pPr>
+            <a:r>
+              <a:rPr dirty="0"/>
+              <a:t>    </a:t>
+            </a:r>
+            <a:r>
+              <a:rPr dirty="0" err="1"/>
+              <a:t>Politicas</a:t>
+            </a:r>
+            <a:r>
+              <a:rPr dirty="0"/>
+              <a:t> de endorsement </a:t>
+            </a:r>
+            <a:r>
+              <a:rPr dirty="0" err="1"/>
+              <a:t>por</a:t>
+            </a:r>
+            <a:r>
+              <a:rPr dirty="0"/>
+              <a:t> </a:t>
+            </a:r>
+            <a:r>
+              <a:rPr dirty="0" err="1"/>
+              <a:t>chaincode</a:t>
+            </a:r>
+            <a:r>
+              <a:rPr dirty="0"/>
+              <a:t> o state-based </a:t>
+            </a:r>
+            <a:r>
+              <a:rPr dirty="0" err="1"/>
+              <a:t>por</a:t>
+            </a:r>
+            <a:r>
+              <a:rPr dirty="0"/>
+              <a:t> key.</a:t>
+            </a:r>
+          </a:p>
+          <a:p>
+            <a:pPr lvl="1">
+              <a:spcAft>
+                <a:spcPts val="400"/>
+              </a:spcAft>
+              <a:defRPr sz="1700">
+                <a:solidFill>
+                  <a:srgbClr val="666666"/>
+                </a:solidFill>
+                <a:latin typeface="Calibri"/>
+              </a:defRPr>
+            </a:pPr>
+            <a:r>
+              <a:rPr dirty="0"/>
+              <a:t>    Lifecycle: </a:t>
+            </a:r>
+            <a:r>
+              <a:rPr dirty="0" err="1"/>
+              <a:t>approveformyorg</a:t>
+            </a:r>
+            <a:r>
+              <a:rPr dirty="0"/>
+              <a:t> + commit </a:t>
+            </a:r>
+            <a:r>
+              <a:rPr dirty="0" err="1"/>
+              <a:t>requieren</a:t>
+            </a:r>
+            <a:r>
+              <a:rPr dirty="0"/>
+              <a:t> </a:t>
+            </a:r>
+            <a:r>
+              <a:rPr dirty="0" err="1"/>
+              <a:t>consenso</a:t>
+            </a:r>
+            <a:r>
+              <a:rPr dirty="0"/>
+              <a:t>.</a:t>
+            </a:r>
+          </a:p>
+          <a:p>
+            <a:pPr lvl="1">
+              <a:spcAft>
+                <a:spcPts val="400"/>
+              </a:spcAft>
+              <a:defRPr sz="1700">
+                <a:solidFill>
+                  <a:srgbClr val="666666"/>
+                </a:solidFill>
+                <a:latin typeface="Calibri"/>
+              </a:defRPr>
+            </a:pPr>
+            <a:r>
+              <a:rPr dirty="0"/>
+              <a:t>    </a:t>
+            </a:r>
+            <a:r>
+              <a:rPr dirty="0" err="1"/>
+              <a:t>Configuracion</a:t>
+            </a:r>
+            <a:r>
+              <a:rPr dirty="0"/>
+              <a:t> del canal: </a:t>
+            </a:r>
+            <a:r>
+              <a:rPr dirty="0" err="1"/>
+              <a:t>cambios</a:t>
+            </a:r>
+            <a:r>
+              <a:rPr dirty="0"/>
+              <a:t> via </a:t>
+            </a:r>
+            <a:r>
+              <a:rPr dirty="0" err="1"/>
+              <a:t>propuesta</a:t>
+            </a:r>
+            <a:r>
+              <a:rPr dirty="0"/>
+              <a:t> + </a:t>
+            </a:r>
+            <a:r>
+              <a:rPr dirty="0" err="1"/>
+              <a:t>firmas</a:t>
+            </a:r>
+            <a:r>
+              <a:rPr dirty="0"/>
+              <a:t> + update.</a:t>
             </a:r>
           </a:p>
         </p:txBody>
@@ -4289,19 +5324,38 @@
 </p:sld>
 </file>
 
-<file path=ppt/slides/slide5.xml><?xml version="1.0" encoding="utf-8"?>
-<p:sld xmlns:a="http://schemas.openxmlformats.org/drawingml/2006/main" xmlns:p="http://schemas.openxmlformats.org/presentationml/2006/main" xmlns:r="http://schemas.openxmlformats.org/officeDocument/2006/relationships">
+<file path=ppt/slides/slide13.xml><?xml version="1.0" encoding="utf-8"?>
+<p:sld xmlns:a="http://schemas.openxmlformats.org/drawingml/2006/main" xmlns:r="http://schemas.openxmlformats.org/officeDocument/2006/relationships" xmlns:p="http://schemas.openxmlformats.org/presentationml/2006/main">
   <p:cSld>
     <p:spTree>
       <p:nvGrpSpPr>
-        <p:cNvPr id="1" name=""/>
+        <p:cNvPr id="1" name="">
+          <a:extLst>
+            <a:ext uri="{FF2B5EF4-FFF2-40B4-BE49-F238E27FC236}">
+              <a16:creationId xmlns:a16="http://schemas.microsoft.com/office/drawing/2014/main" id="{629D3883-EFD0-EBD4-00D3-9CE640831222}"/>
+            </a:ext>
+          </a:extLst>
+        </p:cNvPr>
         <p:cNvGrpSpPr/>
         <p:nvPr/>
       </p:nvGrpSpPr>
-      <p:grpSpPr/>
-      <p:sp>
-        <p:nvSpPr>
-          <p:cNvPr id="2" name="Rectangle 1"/>
+      <p:grpSpPr>
+        <a:xfrm>
+          <a:off x="0" y="0"/>
+          <a:ext cx="0" cy="0"/>
+          <a:chOff x="0" y="0"/>
+          <a:chExt cx="0" cy="0"/>
+        </a:xfrm>
+      </p:grpSpPr>
+      <p:sp>
+        <p:nvSpPr>
+          <p:cNvPr id="2" name="Rectangle 1">
+            <a:extLst>
+              <a:ext uri="{FF2B5EF4-FFF2-40B4-BE49-F238E27FC236}">
+                <a16:creationId xmlns:a16="http://schemas.microsoft.com/office/drawing/2014/main" id="{02E06754-A856-4AF0-8AA9-89E78DEED6A6}"/>
+              </a:ext>
+            </a:extLst>
+          </p:cNvPr>
           <p:cNvSpPr/>
           <p:nvPr/>
         </p:nvSpPr>
@@ -4339,12 +5393,19 @@
           <a:lstStyle/>
           <a:p>
             <a:pPr algn="ctr"/>
-          </a:p>
-        </p:txBody>
-      </p:sp>
-      <p:sp>
-        <p:nvSpPr>
-          <p:cNvPr id="3" name="TextBox 2"/>
+            <a:endParaRPr/>
+          </a:p>
+        </p:txBody>
+      </p:sp>
+      <p:sp>
+        <p:nvSpPr>
+          <p:cNvPr id="3" name="TextBox 2">
+            <a:extLst>
+              <a:ext uri="{FF2B5EF4-FFF2-40B4-BE49-F238E27FC236}">
+                <a16:creationId xmlns:a16="http://schemas.microsoft.com/office/drawing/2014/main" id="{FE982A04-AA24-9B4D-E8C1-62ADCFFBE901}"/>
+              </a:ext>
+            </a:extLst>
+          </p:cNvPr>
           <p:cNvSpPr txBox="1"/>
           <p:nvPr/>
         </p:nvSpPr>
@@ -4371,14 +5432,20 @@
               </a:defRPr>
             </a:pPr>
             <a:r>
-              <a:t>¿Quien paga que?</a:t>
-            </a:r>
-          </a:p>
-        </p:txBody>
-      </p:sp>
-      <p:sp>
-        <p:nvSpPr>
-          <p:cNvPr id="4" name="Rectangle 3"/>
+              <a:t>Respuestas al repaso</a:t>
+            </a:r>
+          </a:p>
+        </p:txBody>
+      </p:sp>
+      <p:sp>
+        <p:nvSpPr>
+          <p:cNvPr id="4" name="Rectangle 3">
+            <a:extLst>
+              <a:ext uri="{FF2B5EF4-FFF2-40B4-BE49-F238E27FC236}">
+                <a16:creationId xmlns:a16="http://schemas.microsoft.com/office/drawing/2014/main" id="{03CF7974-55AF-FA1F-803E-1B33BD94967F}"/>
+              </a:ext>
+            </a:extLst>
+          </p:cNvPr>
           <p:cNvSpPr/>
           <p:nvPr/>
         </p:nvSpPr>
@@ -4416,19 +5483,26 @@
           <a:lstStyle/>
           <a:p>
             <a:pPr algn="ctr"/>
-          </a:p>
-        </p:txBody>
-      </p:sp>
-      <p:sp>
-        <p:nvSpPr>
-          <p:cNvPr id="5" name="TextBox 4"/>
+            <a:endParaRPr/>
+          </a:p>
+        </p:txBody>
+      </p:sp>
+      <p:sp>
+        <p:nvSpPr>
+          <p:cNvPr id="5" name="TextBox 4">
+            <a:extLst>
+              <a:ext uri="{FF2B5EF4-FFF2-40B4-BE49-F238E27FC236}">
+                <a16:creationId xmlns:a16="http://schemas.microsoft.com/office/drawing/2014/main" id="{4FD4DEB7-5693-78BC-2914-62280E15D52C}"/>
+              </a:ext>
+            </a:extLst>
+          </p:cNvPr>
           <p:cNvSpPr txBox="1"/>
           <p:nvPr/>
         </p:nvSpPr>
         <p:spPr>
           <a:xfrm>
             <a:off x="640080" y="1280160"/>
-            <a:ext cx="10515600" cy="5029200"/>
+            <a:ext cx="10515600" cy="3365024"/>
           </a:xfrm>
           <a:prstGeom prst="rect">
             <a:avLst/>
@@ -4453,7 +5527,123 @@
               </a:defRPr>
             </a:pPr>
             <a:r>
-              <a:t>Cada organizacion paga SU infraestructura:</a:t>
+              <a:rPr lang="es-ES" dirty="0"/>
+              <a:t>4. ¿Quien </a:t>
+            </a:r>
+            <a:r>
+              <a:rPr lang="es-ES" dirty="0" err="1"/>
+              <a:t>deberia</a:t>
+            </a:r>
+            <a:r>
+              <a:rPr lang="es-ES" dirty="0"/>
+              <a:t> pagar los </a:t>
+            </a:r>
+            <a:r>
+              <a:rPr lang="es-ES" dirty="0" err="1"/>
+              <a:t>orderers</a:t>
+            </a:r>
+            <a:r>
+              <a:rPr lang="es-ES" dirty="0"/>
+              <a:t>?</a:t>
+            </a:r>
+          </a:p>
+          <a:p>
+            <a:pPr lvl="1">
+              <a:spcAft>
+                <a:spcPts val="400"/>
+              </a:spcAft>
+              <a:defRPr sz="1700">
+                <a:solidFill>
+                  <a:srgbClr val="666666"/>
+                </a:solidFill>
+                <a:latin typeface="Calibri"/>
+              </a:defRPr>
+            </a:pPr>
+            <a:r>
+              <a:rPr lang="es-ES" dirty="0"/>
+              <a:t>    Depende del modelo: cuota fija por </a:t>
+            </a:r>
+            <a:r>
+              <a:rPr lang="es-ES" dirty="0" err="1"/>
+              <a:t>org</a:t>
+            </a:r>
+            <a:r>
+              <a:rPr lang="es-ES" dirty="0"/>
+              <a:t> o proporcional al uso.</a:t>
+            </a:r>
+          </a:p>
+          <a:p>
+            <a:pPr lvl="1">
+              <a:spcAft>
+                <a:spcPts val="400"/>
+              </a:spcAft>
+              <a:defRPr sz="1700">
+                <a:solidFill>
+                  <a:srgbClr val="666666"/>
+                </a:solidFill>
+                <a:latin typeface="Calibri"/>
+              </a:defRPr>
+            </a:pPr>
+            <a:r>
+              <a:rPr lang="es-ES" dirty="0"/>
+              <a:t>    Modelo sponsor: una </a:t>
+            </a:r>
+            <a:r>
+              <a:rPr lang="es-ES" dirty="0" err="1"/>
+              <a:t>org</a:t>
+            </a:r>
+            <a:r>
+              <a:rPr lang="es-ES" dirty="0"/>
+              <a:t> paga todo al principio (no recomendado a largo plazo).</a:t>
+            </a:r>
+          </a:p>
+          <a:p>
+            <a:pPr lvl="1">
+              <a:spcAft>
+                <a:spcPts val="400"/>
+              </a:spcAft>
+              <a:defRPr sz="1700">
+                <a:solidFill>
+                  <a:srgbClr val="666666"/>
+                </a:solidFill>
+                <a:latin typeface="Calibri"/>
+              </a:defRPr>
+            </a:pPr>
+            <a:r>
+              <a:rPr lang="es-ES" dirty="0"/>
+              <a:t>    </a:t>
+            </a:r>
+            <a:r>
+              <a:rPr lang="es-ES" dirty="0" err="1"/>
+              <a:t>Producci­on</a:t>
+            </a:r>
+            <a:r>
+              <a:rPr lang="es-ES" dirty="0"/>
+              <a:t>: cada </a:t>
+            </a:r>
+            <a:r>
+              <a:rPr lang="es-ES" dirty="0" err="1"/>
+              <a:t>org</a:t>
+            </a:r>
+            <a:r>
+              <a:rPr lang="es-ES" dirty="0"/>
+              <a:t> opera su propio </a:t>
+            </a:r>
+            <a:r>
+              <a:rPr lang="es-ES" dirty="0" err="1"/>
+              <a:t>orderer</a:t>
+            </a:r>
+            <a:r>
+              <a:rPr lang="es-ES" dirty="0"/>
+              <a:t> (</a:t>
+            </a:r>
+            <a:r>
+              <a:rPr lang="es-ES" dirty="0" err="1"/>
+              <a:t>Raft</a:t>
+            </a:r>
+            <a:r>
+              <a:rPr lang="es-ES" dirty="0"/>
+              <a:t> distribuido).</a:t>
             </a:r>
           </a:p>
           <a:p>
@@ -4469,182 +5659,136 @@
               </a:defRPr>
             </a:pPr>
             <a:r>
-              <a:t>  Sus peers, su Fabric CA, su almacenamiento</a:t>
-            </a:r>
-          </a:p>
-          <a:p>
-            <a:pPr>
-              <a:spcAft>
-                <a:spcPts val="800"/>
-              </a:spcAft>
-              <a:defRPr sz="2000">
-                <a:solidFill>
-                  <a:srgbClr val="333333"/>
-                </a:solidFill>
-                <a:latin typeface="Calibri"/>
-              </a:defRPr>
-            </a:pPr>
-          </a:p>
-          <a:p>
-            <a:pPr>
-              <a:spcAft>
-                <a:spcPts val="800"/>
-              </a:spcAft>
-              <a:defRPr sz="2000">
-                <a:solidFill>
-                  <a:srgbClr val="333333"/>
-                </a:solidFill>
-                <a:latin typeface="Calibri"/>
-              </a:defRPr>
-            </a:pPr>
-            <a:r>
-              <a:t>La infraestructura compartida es el debate:</a:t>
-            </a:r>
-          </a:p>
-          <a:p>
-            <a:pPr>
-              <a:spcAft>
-                <a:spcPts val="800"/>
-              </a:spcAft>
-              <a:defRPr sz="2000">
-                <a:solidFill>
-                  <a:srgbClr val="333333"/>
-                </a:solidFill>
-                <a:latin typeface="Calibri"/>
-              </a:defRPr>
-            </a:pPr>
-            <a:r>
-              <a:t>  Orderer: ¿quien lo opera? ¿se reparte el coste?</a:t>
-            </a:r>
-          </a:p>
-          <a:p>
-            <a:pPr>
-              <a:spcAft>
-                <a:spcPts val="800"/>
-              </a:spcAft>
-              <a:defRPr sz="2000">
-                <a:solidFill>
-                  <a:srgbClr val="333333"/>
-                </a:solidFill>
-                <a:latin typeface="Calibri"/>
-              </a:defRPr>
-            </a:pPr>
-            <a:r>
-              <a:t>  Desarrollo de chaincodes: ¿quien lo paga? ¿quien lo mantiene?</a:t>
-            </a:r>
-          </a:p>
-          <a:p>
-            <a:pPr>
-              <a:spcAft>
-                <a:spcPts val="800"/>
-              </a:spcAft>
-              <a:defRPr sz="2000">
-                <a:solidFill>
-                  <a:srgbClr val="333333"/>
-                </a:solidFill>
-                <a:latin typeface="Calibri"/>
-              </a:defRPr>
-            </a:pPr>
-            <a:r>
-              <a:t>  Soporte y operaciones: ¿hay un equipo central o cada org se apana?</a:t>
-            </a:r>
-          </a:p>
-          <a:p>
-            <a:pPr>
-              <a:spcAft>
-                <a:spcPts val="800"/>
-              </a:spcAft>
-              <a:defRPr sz="2000">
-                <a:solidFill>
-                  <a:srgbClr val="333333"/>
-                </a:solidFill>
-                <a:latin typeface="Calibri"/>
-              </a:defRPr>
-            </a:pPr>
-          </a:p>
-          <a:p>
-            <a:pPr>
-              <a:spcAft>
-                <a:spcPts val="800"/>
-              </a:spcAft>
-              <a:defRPr sz="2000">
-                <a:solidFill>
-                  <a:srgbClr val="333333"/>
-                </a:solidFill>
-                <a:latin typeface="Calibri"/>
-              </a:defRPr>
-            </a:pPr>
-            <a:r>
-              <a:t>Modelos comunes:</a:t>
-            </a:r>
-          </a:p>
-          <a:p>
-            <a:pPr>
-              <a:spcAft>
-                <a:spcPts val="800"/>
-              </a:spcAft>
-              <a:defRPr sz="2000">
-                <a:solidFill>
-                  <a:srgbClr val="333333"/>
-                </a:solidFill>
-                <a:latin typeface="Calibri"/>
-              </a:defRPr>
-            </a:pPr>
-            <a:r>
-              <a:t>  Cuota fija: todos pagan lo mismo (simple, pero ¿justo?)</a:t>
-            </a:r>
-          </a:p>
-          <a:p>
-            <a:pPr>
-              <a:spcAft>
-                <a:spcPts val="800"/>
-              </a:spcAft>
-              <a:defRPr sz="2000">
-                <a:solidFill>
-                  <a:srgbClr val="333333"/>
-                </a:solidFill>
-                <a:latin typeface="Calibri"/>
-              </a:defRPr>
-            </a:pPr>
-            <a:r>
-              <a:t>  Por uso: paga mas quien mas transacciones hace</a:t>
-            </a:r>
-          </a:p>
-          <a:p>
-            <a:pPr>
-              <a:spcAft>
-                <a:spcPts val="800"/>
-              </a:spcAft>
-              <a:defRPr sz="2000">
-                <a:solidFill>
-                  <a:srgbClr val="333333"/>
-                </a:solidFill>
-                <a:latin typeface="Calibri"/>
-              </a:defRPr>
-            </a:pPr>
-            <a:r>
-              <a:t>  Por tamano: las orgs grandes pagan mas que las pequenas</a:t>
-            </a:r>
-          </a:p>
-          <a:p>
-            <a:pPr>
-              <a:spcAft>
-                <a:spcPts val="800"/>
-              </a:spcAft>
-              <a:defRPr sz="2000">
-                <a:solidFill>
-                  <a:srgbClr val="333333"/>
-                </a:solidFill>
-                <a:latin typeface="Calibri"/>
-              </a:defRPr>
-            </a:pPr>
-            <a:r>
-              <a:t>  Sponsor: una org grande subvenciona al resto (al principio)</a:t>
-            </a:r>
+              <a:rPr lang="es-ES" dirty="0"/>
+              <a:t>5. ¿Que definir ANTES de que una </a:t>
+            </a:r>
+            <a:r>
+              <a:rPr lang="es-ES" dirty="0" err="1"/>
+              <a:t>org</a:t>
+            </a:r>
+            <a:r>
+              <a:rPr lang="es-ES" dirty="0"/>
+              <a:t> abandone?</a:t>
+            </a:r>
+          </a:p>
+          <a:p>
+            <a:pPr lvl="1">
+              <a:spcAft>
+                <a:spcPts val="400"/>
+              </a:spcAft>
+              <a:defRPr sz="1700">
+                <a:solidFill>
+                  <a:srgbClr val="666666"/>
+                </a:solidFill>
+                <a:latin typeface="Calibri"/>
+              </a:defRPr>
+            </a:pPr>
+            <a:r>
+              <a:rPr lang="es-ES" dirty="0"/>
+              <a:t>    Como se revocan sus certificados y se actualiza la CRL.</a:t>
+            </a:r>
+          </a:p>
+          <a:p>
+            <a:pPr lvl="1">
+              <a:spcAft>
+                <a:spcPts val="400"/>
+              </a:spcAft>
+              <a:defRPr sz="1700">
+                <a:solidFill>
+                  <a:srgbClr val="666666"/>
+                </a:solidFill>
+                <a:latin typeface="Calibri"/>
+              </a:defRPr>
+            </a:pPr>
+            <a:r>
+              <a:rPr lang="es-ES" dirty="0"/>
+              <a:t>    Que pasa con los datos en el </a:t>
+            </a:r>
+            <a:r>
+              <a:rPr lang="es-ES" dirty="0" err="1"/>
+              <a:t>ledger</a:t>
+            </a:r>
+            <a:r>
+              <a:rPr lang="es-ES" dirty="0"/>
+              <a:t> (inmutables, no se borran).</a:t>
+            </a:r>
+          </a:p>
+          <a:p>
+            <a:pPr lvl="1">
+              <a:spcAft>
+                <a:spcPts val="400"/>
+              </a:spcAft>
+              <a:defRPr sz="1700">
+                <a:solidFill>
+                  <a:srgbClr val="666666"/>
+                </a:solidFill>
+                <a:latin typeface="Calibri"/>
+              </a:defRPr>
+            </a:pPr>
+            <a:r>
+              <a:rPr lang="es-ES" dirty="0"/>
+              <a:t>    Quien asume sus responsabilidades operativas.</a:t>
+            </a:r>
+          </a:p>
+          <a:p>
+            <a:pPr lvl="1">
+              <a:spcAft>
+                <a:spcPts val="400"/>
+              </a:spcAft>
+              <a:defRPr sz="1700">
+                <a:solidFill>
+                  <a:srgbClr val="666666"/>
+                </a:solidFill>
+                <a:latin typeface="Calibri"/>
+              </a:defRPr>
+            </a:pPr>
+            <a:r>
+              <a:rPr lang="es-ES" dirty="0"/>
+              <a:t>    Clausula de </a:t>
+            </a:r>
+            <a:r>
+              <a:rPr lang="es-ES" dirty="0" err="1"/>
+              <a:t>resolucion</a:t>
+            </a:r>
+            <a:r>
+              <a:rPr lang="es-ES" dirty="0"/>
+              <a:t> de disputas y </a:t>
+            </a:r>
+            <a:r>
+              <a:rPr lang="es-ES" dirty="0" err="1"/>
+              <a:t>sucesion</a:t>
+            </a:r>
+            <a:r>
+              <a:rPr lang="es-ES" dirty="0"/>
+              <a:t>.</a:t>
+            </a:r>
+          </a:p>
+          <a:p>
+            <a:pPr lvl="1">
+              <a:spcAft>
+                <a:spcPts val="400"/>
+              </a:spcAft>
+              <a:defRPr sz="1700">
+                <a:solidFill>
+                  <a:srgbClr val="666666"/>
+                </a:solidFill>
+                <a:latin typeface="Calibri"/>
+              </a:defRPr>
+            </a:pPr>
+            <a:r>
+              <a:rPr lang="es-ES"/>
+              <a:t>    Todo esto DEBE estar en el acuerdo del consorcio ANTES de empezar.</a:t>
+            </a:r>
+            <a:endParaRPr lang="es-ES" dirty="0"/>
           </a:p>
         </p:txBody>
       </p:sp>
     </p:spTree>
+    <p:extLst>
+      <p:ext uri="{BB962C8B-B14F-4D97-AF65-F5344CB8AC3E}">
+        <p14:creationId xmlns:p14="http://schemas.microsoft.com/office/powerpoint/2010/main" val="2182678678"/>
+      </p:ext>
+    </p:extLst>
   </p:cSld>
   <p:clrMapOvr>
     <a:masterClrMapping/>
@@ -4652,8 +5796,8 @@
 </p:sld>
 </file>
 
-<file path=ppt/slides/slide6.xml><?xml version="1.0" encoding="utf-8"?>
-<p:sld xmlns:a="http://schemas.openxmlformats.org/drawingml/2006/main" xmlns:p="http://schemas.openxmlformats.org/presentationml/2006/main" xmlns:r="http://schemas.openxmlformats.org/officeDocument/2006/relationships">
+<file path=ppt/slides/slide2.xml><?xml version="1.0" encoding="utf-8"?>
+<p:sld xmlns:a="http://schemas.openxmlformats.org/drawingml/2006/main" xmlns:r="http://schemas.openxmlformats.org/officeDocument/2006/relationships" xmlns:p="http://schemas.openxmlformats.org/presentationml/2006/main">
   <p:cSld>
     <p:spTree>
       <p:nvGrpSpPr>
@@ -4661,7 +5805,14 @@
         <p:cNvGrpSpPr/>
         <p:nvPr/>
       </p:nvGrpSpPr>
-      <p:grpSpPr/>
+      <p:grpSpPr>
+        <a:xfrm>
+          <a:off x="0" y="0"/>
+          <a:ext cx="0" cy="0"/>
+          <a:chOff x="0" y="0"/>
+          <a:chExt cx="0" cy="0"/>
+        </a:xfrm>
+      </p:grpSpPr>
       <p:sp>
         <p:nvSpPr>
           <p:cNvPr id="2" name="Rectangle 1"/>
@@ -4702,6 +5853,7 @@
           <a:lstStyle/>
           <a:p>
             <a:pPr algn="ctr"/>
+            <a:endParaRPr/>
           </a:p>
         </p:txBody>
       </p:sp>
@@ -4734,7 +5886,7 @@
               </a:defRPr>
             </a:pPr>
             <a:r>
-              <a:t>Onboarding y offboarding de organizaciones</a:t>
+              <a:t>¿Que es la gobernanza de un consorcio?</a:t>
             </a:r>
           </a:p>
         </p:txBody>
@@ -4779,6 +5931,7 @@
           <a:lstStyle/>
           <a:p>
             <a:pPr algn="ctr"/>
+            <a:endParaRPr/>
           </a:p>
         </p:txBody>
       </p:sp>
@@ -4816,7 +5969,55 @@
               </a:defRPr>
             </a:pPr>
             <a:r>
-              <a:t>Incorporar una nueva org (onboarding):</a:t>
+              <a:t>El conjunto de reglas que definen como se toman las decisiones en la red</a:t>
+            </a:r>
+          </a:p>
+          <a:p>
+            <a:pPr>
+              <a:spcAft>
+                <a:spcPts val="800"/>
+              </a:spcAft>
+              <a:defRPr sz="2000">
+                <a:solidFill>
+                  <a:srgbClr val="333333"/>
+                </a:solidFill>
+                <a:latin typeface="Calibri"/>
+              </a:defRPr>
+            </a:pPr>
+            <a:r>
+              <a:t>No es un tema tecnico: es un tema politico, legal y de negocio</a:t>
+            </a:r>
+          </a:p>
+          <a:p>
+            <a:pPr>
+              <a:spcAft>
+                <a:spcPts val="800"/>
+              </a:spcAft>
+              <a:defRPr sz="2000">
+                <a:solidFill>
+                  <a:srgbClr val="333333"/>
+                </a:solidFill>
+                <a:latin typeface="Calibri"/>
+              </a:defRPr>
+            </a:pPr>
+            <a:r>
+              <a:t>Si la gobernanza no esta clara desde el dia 1, el proyecto fracasara</a:t>
+            </a:r>
+          </a:p>
+          <a:p>
+            <a:pPr>
+              <a:spcAft>
+                <a:spcPts val="800"/>
+              </a:spcAft>
+              <a:defRPr sz="2000">
+                <a:solidFill>
+                  <a:srgbClr val="333333"/>
+                </a:solidFill>
+                <a:latin typeface="Calibri"/>
+              </a:defRPr>
+            </a:pPr>
+            <a:r>
+              <a:t>Preguntas que debe responder:</a:t>
             </a:r>
           </a:p>
           <a:p>
@@ -4832,7 +6033,7 @@
               </a:defRPr>
             </a:pPr>
             <a:r>
-              <a:t>    Evaluacion: ¿cumple los requisitos del consorcio?</a:t>
+              <a:t>    ¿Quien puede unirse a la red? ¿Y quien puede ser expulsado?</a:t>
             </a:r>
           </a:p>
           <a:p>
@@ -4848,7 +6049,7 @@
               </a:defRPr>
             </a:pPr>
             <a:r>
-              <a:t>    Aprobacion: las orgs existentes votan (MAJORITY o ALL)</a:t>
+              <a:t>    ¿Quien aprueba cambios en los chaincodes?</a:t>
             </a:r>
           </a:p>
           <a:p>
@@ -4864,7 +6065,7 @@
               </a:defRPr>
             </a:pPr>
             <a:r>
-              <a:t>    Tecnico: generar identidades, anadir al canal (doc 06)</a:t>
+              <a:t>    ¿Quien paga la infraestructura (orderers, CAs)?</a:t>
             </a:r>
           </a:p>
           <a:p>
@@ -4880,7 +6081,7 @@
               </a:defRPr>
             </a:pPr>
             <a:r>
-              <a:t>    Legal: firmar el acuerdo de consorcio</a:t>
+              <a:t>    ¿Como se resuelven los conflictos?</a:t>
             </a:r>
           </a:p>
           <a:p>
@@ -4896,103 +6097,7 @@
               </a:defRPr>
             </a:pPr>
             <a:r>
-              <a:t>    Operativo: instalar chaincodes, sincronizar ledger</a:t>
-            </a:r>
-          </a:p>
-          <a:p>
-            <a:pPr>
-              <a:spcAft>
-                <a:spcPts val="800"/>
-              </a:spcAft>
-              <a:defRPr sz="2000">
-                <a:solidFill>
-                  <a:srgbClr val="333333"/>
-                </a:solidFill>
-                <a:latin typeface="Calibri"/>
-              </a:defRPr>
-            </a:pPr>
-            <a:r>
-              <a:t>Expulsar o que se vaya una org (offboarding):</a:t>
-            </a:r>
-          </a:p>
-          <a:p>
-            <a:pPr lvl="1">
-              <a:spcAft>
-                <a:spcPts val="400"/>
-              </a:spcAft>
-              <a:defRPr sz="1700">
-                <a:solidFill>
-                  <a:srgbClr val="666666"/>
-                </a:solidFill>
-                <a:latin typeface="Calibri"/>
-              </a:defRPr>
-            </a:pPr>
-            <a:r>
-              <a:t>    ¿Que pasa con sus datos en el ledger? (son inmutables, no se pueden borrar)</a:t>
-            </a:r>
-          </a:p>
-          <a:p>
-            <a:pPr lvl="1">
-              <a:spcAft>
-                <a:spcPts val="400"/>
-              </a:spcAft>
-              <a:defRPr sz="1700">
-                <a:solidFill>
-                  <a:srgbClr val="666666"/>
-                </a:solidFill>
-                <a:latin typeface="Calibri"/>
-              </a:defRPr>
-            </a:pPr>
-            <a:r>
-              <a:t>    ¿Que pasa con sus certificados? (revocar via CRL)</a:t>
-            </a:r>
-          </a:p>
-          <a:p>
-            <a:pPr lvl="1">
-              <a:spcAft>
-                <a:spcPts val="400"/>
-              </a:spcAft>
-              <a:defRPr sz="1700">
-                <a:solidFill>
-                  <a:srgbClr val="666666"/>
-                </a:solidFill>
-                <a:latin typeface="Calibri"/>
-              </a:defRPr>
-            </a:pPr>
-            <a:r>
-              <a:t>    ¿Puede llevarse una copia de los datos? (depende del acuerdo)</a:t>
-            </a:r>
-          </a:p>
-          <a:p>
-            <a:pPr lvl="1">
-              <a:spcAft>
-                <a:spcPts val="400"/>
-              </a:spcAft>
-              <a:defRPr sz="1700">
-                <a:solidFill>
-                  <a:srgbClr val="666666"/>
-                </a:solidFill>
-                <a:latin typeface="Calibri"/>
-              </a:defRPr>
-            </a:pPr>
-            <a:r>
-              <a:t>    ¿Como se redistribuyen sus responsabilidades?</a:t>
-            </a:r>
-          </a:p>
-          <a:p>
-            <a:pPr lvl="1">
-              <a:spcAft>
-                <a:spcPts val="400"/>
-              </a:spcAft>
-              <a:defRPr sz="1700">
-                <a:solidFill>
-                  <a:srgbClr val="666666"/>
-                </a:solidFill>
-                <a:latin typeface="Calibri"/>
-              </a:defRPr>
-            </a:pPr>
-            <a:r>
-              <a:t>    Esto DEBE estar definido ANTES de que pase</a:t>
+              <a:t>    ¿Que pasa con los datos si una org abandona?</a:t>
             </a:r>
           </a:p>
         </p:txBody>
@@ -5005,8 +6110,8 @@
 </p:sld>
 </file>
 
-<file path=ppt/slides/slide7.xml><?xml version="1.0" encoding="utf-8"?>
-<p:sld xmlns:a="http://schemas.openxmlformats.org/drawingml/2006/main" xmlns:p="http://schemas.openxmlformats.org/presentationml/2006/main" xmlns:r="http://schemas.openxmlformats.org/officeDocument/2006/relationships">
+<file path=ppt/slides/slide3.xml><?xml version="1.0" encoding="utf-8"?>
+<p:sld xmlns:a="http://schemas.openxmlformats.org/drawingml/2006/main" xmlns:r="http://schemas.openxmlformats.org/officeDocument/2006/relationships" xmlns:p="http://schemas.openxmlformats.org/presentationml/2006/main">
   <p:cSld>
     <p:spTree>
       <p:nvGrpSpPr>
@@ -5014,7 +6119,14 @@
         <p:cNvGrpSpPr/>
         <p:nvPr/>
       </p:nvGrpSpPr>
-      <p:grpSpPr/>
+      <p:grpSpPr>
+        <a:xfrm>
+          <a:off x="0" y="0"/>
+          <a:ext cx="0" cy="0"/>
+          <a:chOff x="0" y="0"/>
+          <a:chExt cx="0" cy="0"/>
+        </a:xfrm>
+      </p:grpSpPr>
       <p:sp>
         <p:nvSpPr>
           <p:cNvPr id="2" name="Rectangle 1"/>
@@ -5055,6 +6167,7 @@
           <a:lstStyle/>
           <a:p>
             <a:pPr algn="ctr"/>
+            <a:endParaRPr/>
           </a:p>
         </p:txBody>
       </p:sp>
@@ -5087,7 +6200,7 @@
               </a:defRPr>
             </a:pPr>
             <a:r>
-              <a:t>Caso Alastria: gobernanza de un consorcio real</a:t>
+              <a:t>Modelos de gobernanza</a:t>
             </a:r>
           </a:p>
         </p:txBody>
@@ -5132,6 +6245,7 @@
           <a:lstStyle/>
           <a:p>
             <a:pPr algn="ctr"/>
+            <a:endParaRPr/>
           </a:p>
         </p:txBody>
       </p:sp>
@@ -5169,6 +6283,1454 @@
               </a:defRPr>
             </a:pPr>
             <a:r>
+              <a:t>Fundador dominante: una empresa crea la red y pone las reglas</a:t>
+            </a:r>
+          </a:p>
+          <a:p>
+            <a:pPr>
+              <a:spcAft>
+                <a:spcPts val="800"/>
+              </a:spcAft>
+              <a:defRPr sz="2000">
+                <a:solidFill>
+                  <a:srgbClr val="333333"/>
+                </a:solidFill>
+                <a:latin typeface="Calibri"/>
+              </a:defRPr>
+            </a:pPr>
+            <a:r>
+              <a:t>  Ejemplo: Walmart Food Trust. Walmart decide, los proveedores acatan</a:t>
+            </a:r>
+          </a:p>
+          <a:p>
+            <a:pPr>
+              <a:spcAft>
+                <a:spcPts val="800"/>
+              </a:spcAft>
+              <a:defRPr sz="2000">
+                <a:solidFill>
+                  <a:srgbClr val="333333"/>
+                </a:solidFill>
+                <a:latin typeface="Calibri"/>
+              </a:defRPr>
+            </a:pPr>
+            <a:r>
+              <a:t>  Pro: rapido de arrancar. Contra: los demas desconfian</a:t>
+            </a:r>
+          </a:p>
+          <a:p>
+            <a:pPr>
+              <a:spcAft>
+                <a:spcPts val="800"/>
+              </a:spcAft>
+              <a:defRPr sz="2000">
+                <a:solidFill>
+                  <a:srgbClr val="333333"/>
+                </a:solidFill>
+                <a:latin typeface="Calibri"/>
+              </a:defRPr>
+            </a:pPr>
+            <a:endParaRPr/>
+          </a:p>
+          <a:p>
+            <a:pPr>
+              <a:spcAft>
+                <a:spcPts val="800"/>
+              </a:spcAft>
+              <a:defRPr sz="2000">
+                <a:solidFill>
+                  <a:srgbClr val="333333"/>
+                </a:solidFill>
+                <a:latin typeface="Calibri"/>
+              </a:defRPr>
+            </a:pPr>
+            <a:r>
+              <a:t>Democratico: todas las orgs tienen el mismo voto</a:t>
+            </a:r>
+          </a:p>
+          <a:p>
+            <a:pPr>
+              <a:spcAft>
+                <a:spcPts val="800"/>
+              </a:spcAft>
+              <a:defRPr sz="2000">
+                <a:solidFill>
+                  <a:srgbClr val="333333"/>
+                </a:solidFill>
+                <a:latin typeface="Calibri"/>
+              </a:defRPr>
+            </a:pPr>
+            <a:r>
+              <a:t>  Ejemplo: Alastria. Cada miembro un voto en la asamblea</a:t>
+            </a:r>
+          </a:p>
+          <a:p>
+            <a:pPr>
+              <a:spcAft>
+                <a:spcPts val="800"/>
+              </a:spcAft>
+              <a:defRPr sz="2000">
+                <a:solidFill>
+                  <a:srgbClr val="333333"/>
+                </a:solidFill>
+                <a:latin typeface="Calibri"/>
+              </a:defRPr>
+            </a:pPr>
+            <a:r>
+              <a:t>  Pro: equitativo. Contra: lento, dificil llegar a acuerdos</a:t>
+            </a:r>
+          </a:p>
+          <a:p>
+            <a:pPr>
+              <a:spcAft>
+                <a:spcPts val="800"/>
+              </a:spcAft>
+              <a:defRPr sz="2000">
+                <a:solidFill>
+                  <a:srgbClr val="333333"/>
+                </a:solidFill>
+                <a:latin typeface="Calibri"/>
+              </a:defRPr>
+            </a:pPr>
+            <a:endParaRPr/>
+          </a:p>
+          <a:p>
+            <a:pPr>
+              <a:spcAft>
+                <a:spcPts val="800"/>
+              </a:spcAft>
+              <a:defRPr sz="2000">
+                <a:solidFill>
+                  <a:srgbClr val="333333"/>
+                </a:solidFill>
+                <a:latin typeface="Calibri"/>
+              </a:defRPr>
+            </a:pPr>
+            <a:r>
+              <a:t>Federado: un comite tecnico/ejecutivo toma las decisiones operativas</a:t>
+            </a:r>
+          </a:p>
+          <a:p>
+            <a:pPr>
+              <a:spcAft>
+                <a:spcPts val="800"/>
+              </a:spcAft>
+              <a:defRPr sz="2000">
+                <a:solidFill>
+                  <a:srgbClr val="333333"/>
+                </a:solidFill>
+                <a:latin typeface="Calibri"/>
+              </a:defRPr>
+            </a:pPr>
+            <a:r>
+              <a:t>  Ejemplo: EBSI. La EBP decide la estrategia, los estados operan</a:t>
+            </a:r>
+          </a:p>
+          <a:p>
+            <a:pPr>
+              <a:spcAft>
+                <a:spcPts val="800"/>
+              </a:spcAft>
+              <a:defRPr sz="2000">
+                <a:solidFill>
+                  <a:srgbClr val="333333"/>
+                </a:solidFill>
+                <a:latin typeface="Calibri"/>
+              </a:defRPr>
+            </a:pPr>
+            <a:r>
+              <a:t>  Pro: agil. Contra: el comite puede desconectarse de los miembros</a:t>
+            </a:r>
+          </a:p>
+        </p:txBody>
+      </p:sp>
+    </p:spTree>
+  </p:cSld>
+  <p:clrMapOvr>
+    <a:masterClrMapping/>
+  </p:clrMapOvr>
+</p:sld>
+</file>
+
+<file path=ppt/slides/slide4.xml><?xml version="1.0" encoding="utf-8"?>
+<p:sld xmlns:a="http://schemas.openxmlformats.org/drawingml/2006/main" xmlns:r="http://schemas.openxmlformats.org/officeDocument/2006/relationships" xmlns:p="http://schemas.openxmlformats.org/presentationml/2006/main">
+  <p:cSld>
+    <p:spTree>
+      <p:nvGrpSpPr>
+        <p:cNvPr id="1" name=""/>
+        <p:cNvGrpSpPr/>
+        <p:nvPr/>
+      </p:nvGrpSpPr>
+      <p:grpSpPr>
+        <a:xfrm>
+          <a:off x="0" y="0"/>
+          <a:ext cx="0" cy="0"/>
+          <a:chOff x="0" y="0"/>
+          <a:chExt cx="0" cy="0"/>
+        </a:xfrm>
+      </p:grpSpPr>
+      <p:sp>
+        <p:nvSpPr>
+          <p:cNvPr id="2" name="Rectangle 1"/>
+          <p:cNvSpPr/>
+          <p:nvPr/>
+        </p:nvSpPr>
+        <p:spPr>
+          <a:xfrm>
+            <a:off x="0" y="0"/>
+            <a:ext cx="12188952" cy="73152"/>
+          </a:xfrm>
+          <a:prstGeom prst="rect">
+            <a:avLst/>
+          </a:prstGeom>
+          <a:solidFill>
+            <a:srgbClr val="22627E"/>
+          </a:solidFill>
+          <a:ln>
+            <a:noFill/>
+          </a:ln>
+        </p:spPr>
+        <p:style>
+          <a:lnRef idx="1">
+            <a:schemeClr val="accent1"/>
+          </a:lnRef>
+          <a:fillRef idx="3">
+            <a:schemeClr val="accent1"/>
+          </a:fillRef>
+          <a:effectRef idx="2">
+            <a:schemeClr val="accent1"/>
+          </a:effectRef>
+          <a:fontRef idx="minor">
+            <a:schemeClr val="lt1"/>
+          </a:fontRef>
+        </p:style>
+        <p:txBody>
+          <a:bodyPr rtlCol="0" anchor="ctr"/>
+          <a:lstStyle/>
+          <a:p>
+            <a:pPr algn="ctr"/>
+            <a:endParaRPr/>
+          </a:p>
+        </p:txBody>
+      </p:sp>
+      <p:sp>
+        <p:nvSpPr>
+          <p:cNvPr id="3" name="TextBox 2"/>
+          <p:cNvSpPr txBox="1"/>
+          <p:nvPr/>
+        </p:nvSpPr>
+        <p:spPr>
+          <a:xfrm>
+            <a:off x="457200" y="274320"/>
+            <a:ext cx="10972800" cy="731520"/>
+          </a:xfrm>
+          <a:prstGeom prst="rect">
+            <a:avLst/>
+          </a:prstGeom>
+          <a:noFill/>
+        </p:spPr>
+        <p:txBody>
+          <a:bodyPr wrap="square"/>
+          <a:lstStyle/>
+          <a:p>
+            <a:pPr algn="l">
+              <a:defRPr sz="3200" b="1">
+                <a:solidFill>
+                  <a:srgbClr val="22627E"/>
+                </a:solidFill>
+                <a:latin typeface="Calibri"/>
+              </a:defRPr>
+            </a:pPr>
+            <a:r>
+              <a:t>Gobernanza en Fabric: las politicas como herramienta</a:t>
+            </a:r>
+          </a:p>
+        </p:txBody>
+      </p:sp>
+      <p:sp>
+        <p:nvSpPr>
+          <p:cNvPr id="4" name="Rectangle 3"/>
+          <p:cNvSpPr/>
+          <p:nvPr/>
+        </p:nvSpPr>
+        <p:spPr>
+          <a:xfrm>
+            <a:off x="457200" y="1051560"/>
+            <a:ext cx="10972800" cy="27432"/>
+          </a:xfrm>
+          <a:prstGeom prst="rect">
+            <a:avLst/>
+          </a:prstGeom>
+          <a:solidFill>
+            <a:srgbClr val="22627E"/>
+          </a:solidFill>
+          <a:ln>
+            <a:noFill/>
+          </a:ln>
+        </p:spPr>
+        <p:style>
+          <a:lnRef idx="1">
+            <a:schemeClr val="accent1"/>
+          </a:lnRef>
+          <a:fillRef idx="3">
+            <a:schemeClr val="accent1"/>
+          </a:fillRef>
+          <a:effectRef idx="2">
+            <a:schemeClr val="accent1"/>
+          </a:effectRef>
+          <a:fontRef idx="minor">
+            <a:schemeClr val="lt1"/>
+          </a:fontRef>
+        </p:style>
+        <p:txBody>
+          <a:bodyPr rtlCol="0" anchor="ctr"/>
+          <a:lstStyle/>
+          <a:p>
+            <a:pPr algn="ctr"/>
+            <a:endParaRPr/>
+          </a:p>
+        </p:txBody>
+      </p:sp>
+      <p:sp>
+        <p:nvSpPr>
+          <p:cNvPr id="5" name="TextBox 4"/>
+          <p:cNvSpPr txBox="1"/>
+          <p:nvPr/>
+        </p:nvSpPr>
+        <p:spPr>
+          <a:xfrm>
+            <a:off x="640080" y="1280160"/>
+            <a:ext cx="10515600" cy="5029200"/>
+          </a:xfrm>
+          <a:prstGeom prst="rect">
+            <a:avLst/>
+          </a:prstGeom>
+          <a:noFill/>
+        </p:spPr>
+        <p:txBody>
+          <a:bodyPr wrap="square">
+            <a:spAutoFit/>
+          </a:bodyPr>
+          <a:lstStyle/>
+          <a:p>
+            <a:pPr>
+              <a:spcAft>
+                <a:spcPts val="800"/>
+              </a:spcAft>
+              <a:defRPr sz="2000">
+                <a:solidFill>
+                  <a:srgbClr val="333333"/>
+                </a:solidFill>
+                <a:latin typeface="Calibri"/>
+              </a:defRPr>
+            </a:pPr>
+            <a:r>
+              <a:t>Fabric codifica la gobernanza directamente en la configuracion del canal:</a:t>
+            </a:r>
+          </a:p>
+          <a:p>
+            <a:pPr>
+              <a:spcAft>
+                <a:spcPts val="800"/>
+              </a:spcAft>
+              <a:defRPr sz="2000">
+                <a:solidFill>
+                  <a:srgbClr val="333333"/>
+                </a:solidFill>
+                <a:latin typeface="Calibri"/>
+              </a:defRPr>
+            </a:pPr>
+            <a:endParaRPr/>
+          </a:p>
+          <a:p>
+            <a:pPr>
+              <a:spcAft>
+                <a:spcPts val="800"/>
+              </a:spcAft>
+              <a:defRPr sz="2000">
+                <a:solidFill>
+                  <a:srgbClr val="333333"/>
+                </a:solidFill>
+                <a:latin typeface="Calibri"/>
+              </a:defRPr>
+            </a:pPr>
+            <a:r>
+              <a:t>Politicas de canal: quien puede leer, escribir, administrar</a:t>
+            </a:r>
+          </a:p>
+          <a:p>
+            <a:pPr>
+              <a:spcAft>
+                <a:spcPts val="800"/>
+              </a:spcAft>
+              <a:defRPr sz="2000">
+                <a:solidFill>
+                  <a:srgbClr val="333333"/>
+                </a:solidFill>
+                <a:latin typeface="Calibri"/>
+              </a:defRPr>
+            </a:pPr>
+            <a:r>
+              <a:t>  MAJORITY Admins: la mayoria de orgs deben aprobar cambios</a:t>
+            </a:r>
+          </a:p>
+          <a:p>
+            <a:pPr>
+              <a:spcAft>
+                <a:spcPts val="800"/>
+              </a:spcAft>
+              <a:defRPr sz="2000">
+                <a:solidFill>
+                  <a:srgbClr val="333333"/>
+                </a:solidFill>
+                <a:latin typeface="Calibri"/>
+              </a:defRPr>
+            </a:pPr>
+            <a:r>
+              <a:t>  ALL Admins: unanimidad requerida</a:t>
+            </a:r>
+          </a:p>
+          <a:p>
+            <a:pPr>
+              <a:spcAft>
+                <a:spcPts val="800"/>
+              </a:spcAft>
+              <a:defRPr sz="2000">
+                <a:solidFill>
+                  <a:srgbClr val="333333"/>
+                </a:solidFill>
+                <a:latin typeface="Calibri"/>
+              </a:defRPr>
+            </a:pPr>
+            <a:endParaRPr/>
+          </a:p>
+          <a:p>
+            <a:pPr>
+              <a:spcAft>
+                <a:spcPts val="800"/>
+              </a:spcAft>
+              <a:defRPr sz="2000">
+                <a:solidFill>
+                  <a:srgbClr val="333333"/>
+                </a:solidFill>
+                <a:latin typeface="Calibri"/>
+              </a:defRPr>
+            </a:pPr>
+            <a:r>
+              <a:t>Politicas de endorsement: quien valida cada transaccion</a:t>
+            </a:r>
+          </a:p>
+          <a:p>
+            <a:pPr>
+              <a:spcAft>
+                <a:spcPts val="800"/>
+              </a:spcAft>
+              <a:defRPr sz="2000">
+                <a:solidFill>
+                  <a:srgbClr val="333333"/>
+                </a:solidFill>
+                <a:latin typeface="Calibri"/>
+              </a:defRPr>
+            </a:pPr>
+            <a:r>
+              <a:t>  AND(Org1, Org2): ambas deben aprobar</a:t>
+            </a:r>
+          </a:p>
+          <a:p>
+            <a:pPr>
+              <a:spcAft>
+                <a:spcPts val="800"/>
+              </a:spcAft>
+              <a:defRPr sz="2000">
+                <a:solidFill>
+                  <a:srgbClr val="333333"/>
+                </a:solidFill>
+                <a:latin typeface="Calibri"/>
+              </a:defRPr>
+            </a:pPr>
+            <a:r>
+              <a:t>  OR(Org1, Org2): basta con una</a:t>
+            </a:r>
+          </a:p>
+          <a:p>
+            <a:pPr>
+              <a:spcAft>
+                <a:spcPts val="800"/>
+              </a:spcAft>
+              <a:defRPr sz="2000">
+                <a:solidFill>
+                  <a:srgbClr val="333333"/>
+                </a:solidFill>
+                <a:latin typeface="Calibri"/>
+              </a:defRPr>
+            </a:pPr>
+            <a:endParaRPr/>
+          </a:p>
+          <a:p>
+            <a:pPr>
+              <a:spcAft>
+                <a:spcPts val="800"/>
+              </a:spcAft>
+              <a:defRPr sz="2000">
+                <a:solidFill>
+                  <a:srgbClr val="333333"/>
+                </a:solidFill>
+                <a:latin typeface="Calibri"/>
+              </a:defRPr>
+            </a:pPr>
+            <a:r>
+              <a:t>Lifecycle: aprobar chaincodes requiere mayoria de orgs</a:t>
+            </a:r>
+          </a:p>
+          <a:p>
+            <a:pPr>
+              <a:spcAft>
+                <a:spcPts val="800"/>
+              </a:spcAft>
+              <a:defRPr sz="2000">
+                <a:solidFill>
+                  <a:srgbClr val="333333"/>
+                </a:solidFill>
+                <a:latin typeface="Calibri"/>
+              </a:defRPr>
+            </a:pPr>
+            <a:endParaRPr/>
+          </a:p>
+          <a:p>
+            <a:pPr>
+              <a:spcAft>
+                <a:spcPts val="800"/>
+              </a:spcAft>
+              <a:defRPr sz="2000">
+                <a:solidFill>
+                  <a:srgbClr val="333333"/>
+                </a:solidFill>
+                <a:latin typeface="Calibri"/>
+              </a:defRPr>
+            </a:pPr>
+            <a:r>
+              <a:t>Las politicas de Fabric son gobernanza ejecutable: no son un documento, son codigo.</a:t>
+            </a:r>
+          </a:p>
+        </p:txBody>
+      </p:sp>
+    </p:spTree>
+  </p:cSld>
+  <p:clrMapOvr>
+    <a:masterClrMapping/>
+  </p:clrMapOvr>
+</p:sld>
+</file>
+
+<file path=ppt/slides/slide5.xml><?xml version="1.0" encoding="utf-8"?>
+<p:sld xmlns:a="http://schemas.openxmlformats.org/drawingml/2006/main" xmlns:r="http://schemas.openxmlformats.org/officeDocument/2006/relationships" xmlns:p="http://schemas.openxmlformats.org/presentationml/2006/main">
+  <p:cSld>
+    <p:spTree>
+      <p:nvGrpSpPr>
+        <p:cNvPr id="1" name=""/>
+        <p:cNvGrpSpPr/>
+        <p:nvPr/>
+      </p:nvGrpSpPr>
+      <p:grpSpPr>
+        <a:xfrm>
+          <a:off x="0" y="0"/>
+          <a:ext cx="0" cy="0"/>
+          <a:chOff x="0" y="0"/>
+          <a:chExt cx="0" cy="0"/>
+        </a:xfrm>
+      </p:grpSpPr>
+      <p:sp>
+        <p:nvSpPr>
+          <p:cNvPr id="2" name="Rectangle 1"/>
+          <p:cNvSpPr/>
+          <p:nvPr/>
+        </p:nvSpPr>
+        <p:spPr>
+          <a:xfrm>
+            <a:off x="0" y="0"/>
+            <a:ext cx="12188952" cy="73152"/>
+          </a:xfrm>
+          <a:prstGeom prst="rect">
+            <a:avLst/>
+          </a:prstGeom>
+          <a:solidFill>
+            <a:srgbClr val="22627E"/>
+          </a:solidFill>
+          <a:ln>
+            <a:noFill/>
+          </a:ln>
+        </p:spPr>
+        <p:style>
+          <a:lnRef idx="1">
+            <a:schemeClr val="accent1"/>
+          </a:lnRef>
+          <a:fillRef idx="3">
+            <a:schemeClr val="accent1"/>
+          </a:fillRef>
+          <a:effectRef idx="2">
+            <a:schemeClr val="accent1"/>
+          </a:effectRef>
+          <a:fontRef idx="minor">
+            <a:schemeClr val="lt1"/>
+          </a:fontRef>
+        </p:style>
+        <p:txBody>
+          <a:bodyPr rtlCol="0" anchor="ctr"/>
+          <a:lstStyle/>
+          <a:p>
+            <a:pPr algn="ctr"/>
+            <a:endParaRPr/>
+          </a:p>
+        </p:txBody>
+      </p:sp>
+      <p:sp>
+        <p:nvSpPr>
+          <p:cNvPr id="3" name="TextBox 2"/>
+          <p:cNvSpPr txBox="1"/>
+          <p:nvPr/>
+        </p:nvSpPr>
+        <p:spPr>
+          <a:xfrm>
+            <a:off x="457200" y="274320"/>
+            <a:ext cx="10972800" cy="731520"/>
+          </a:xfrm>
+          <a:prstGeom prst="rect">
+            <a:avLst/>
+          </a:prstGeom>
+          <a:noFill/>
+        </p:spPr>
+        <p:txBody>
+          <a:bodyPr wrap="square"/>
+          <a:lstStyle/>
+          <a:p>
+            <a:pPr algn="l">
+              <a:defRPr sz="3200" b="1">
+                <a:solidFill>
+                  <a:srgbClr val="22627E"/>
+                </a:solidFill>
+                <a:latin typeface="Calibri"/>
+              </a:defRPr>
+            </a:pPr>
+            <a:r>
+              <a:t>¿Quien paga que?</a:t>
+            </a:r>
+          </a:p>
+        </p:txBody>
+      </p:sp>
+      <p:sp>
+        <p:nvSpPr>
+          <p:cNvPr id="4" name="Rectangle 3"/>
+          <p:cNvSpPr/>
+          <p:nvPr/>
+        </p:nvSpPr>
+        <p:spPr>
+          <a:xfrm>
+            <a:off x="457200" y="1051560"/>
+            <a:ext cx="10972800" cy="27432"/>
+          </a:xfrm>
+          <a:prstGeom prst="rect">
+            <a:avLst/>
+          </a:prstGeom>
+          <a:solidFill>
+            <a:srgbClr val="22627E"/>
+          </a:solidFill>
+          <a:ln>
+            <a:noFill/>
+          </a:ln>
+        </p:spPr>
+        <p:style>
+          <a:lnRef idx="1">
+            <a:schemeClr val="accent1"/>
+          </a:lnRef>
+          <a:fillRef idx="3">
+            <a:schemeClr val="accent1"/>
+          </a:fillRef>
+          <a:effectRef idx="2">
+            <a:schemeClr val="accent1"/>
+          </a:effectRef>
+          <a:fontRef idx="minor">
+            <a:schemeClr val="lt1"/>
+          </a:fontRef>
+        </p:style>
+        <p:txBody>
+          <a:bodyPr rtlCol="0" anchor="ctr"/>
+          <a:lstStyle/>
+          <a:p>
+            <a:pPr algn="ctr"/>
+            <a:endParaRPr/>
+          </a:p>
+        </p:txBody>
+      </p:sp>
+      <p:sp>
+        <p:nvSpPr>
+          <p:cNvPr id="5" name="TextBox 4"/>
+          <p:cNvSpPr txBox="1"/>
+          <p:nvPr/>
+        </p:nvSpPr>
+        <p:spPr>
+          <a:xfrm>
+            <a:off x="640080" y="1280160"/>
+            <a:ext cx="10515600" cy="5029200"/>
+          </a:xfrm>
+          <a:prstGeom prst="rect">
+            <a:avLst/>
+          </a:prstGeom>
+          <a:noFill/>
+        </p:spPr>
+        <p:txBody>
+          <a:bodyPr wrap="square">
+            <a:spAutoFit/>
+          </a:bodyPr>
+          <a:lstStyle/>
+          <a:p>
+            <a:pPr>
+              <a:spcAft>
+                <a:spcPts val="800"/>
+              </a:spcAft>
+              <a:defRPr sz="2000">
+                <a:solidFill>
+                  <a:srgbClr val="333333"/>
+                </a:solidFill>
+                <a:latin typeface="Calibri"/>
+              </a:defRPr>
+            </a:pPr>
+            <a:r>
+              <a:t>Cada organizacion paga SU infraestructura:</a:t>
+            </a:r>
+          </a:p>
+          <a:p>
+            <a:pPr>
+              <a:spcAft>
+                <a:spcPts val="800"/>
+              </a:spcAft>
+              <a:defRPr sz="2000">
+                <a:solidFill>
+                  <a:srgbClr val="333333"/>
+                </a:solidFill>
+                <a:latin typeface="Calibri"/>
+              </a:defRPr>
+            </a:pPr>
+            <a:r>
+              <a:t>  Sus peers, su Fabric CA, su almacenamiento</a:t>
+            </a:r>
+          </a:p>
+          <a:p>
+            <a:pPr>
+              <a:spcAft>
+                <a:spcPts val="800"/>
+              </a:spcAft>
+              <a:defRPr sz="2000">
+                <a:solidFill>
+                  <a:srgbClr val="333333"/>
+                </a:solidFill>
+                <a:latin typeface="Calibri"/>
+              </a:defRPr>
+            </a:pPr>
+            <a:endParaRPr/>
+          </a:p>
+          <a:p>
+            <a:pPr>
+              <a:spcAft>
+                <a:spcPts val="800"/>
+              </a:spcAft>
+              <a:defRPr sz="2000">
+                <a:solidFill>
+                  <a:srgbClr val="333333"/>
+                </a:solidFill>
+                <a:latin typeface="Calibri"/>
+              </a:defRPr>
+            </a:pPr>
+            <a:r>
+              <a:t>La infraestructura compartida es el debate:</a:t>
+            </a:r>
+          </a:p>
+          <a:p>
+            <a:pPr>
+              <a:spcAft>
+                <a:spcPts val="800"/>
+              </a:spcAft>
+              <a:defRPr sz="2000">
+                <a:solidFill>
+                  <a:srgbClr val="333333"/>
+                </a:solidFill>
+                <a:latin typeface="Calibri"/>
+              </a:defRPr>
+            </a:pPr>
+            <a:r>
+              <a:t>  Orderer: ¿quien lo opera? ¿se reparte el coste?</a:t>
+            </a:r>
+          </a:p>
+          <a:p>
+            <a:pPr>
+              <a:spcAft>
+                <a:spcPts val="800"/>
+              </a:spcAft>
+              <a:defRPr sz="2000">
+                <a:solidFill>
+                  <a:srgbClr val="333333"/>
+                </a:solidFill>
+                <a:latin typeface="Calibri"/>
+              </a:defRPr>
+            </a:pPr>
+            <a:r>
+              <a:t>  Desarrollo de chaincodes: ¿quien lo paga? ¿quien lo mantiene?</a:t>
+            </a:r>
+          </a:p>
+          <a:p>
+            <a:pPr>
+              <a:spcAft>
+                <a:spcPts val="800"/>
+              </a:spcAft>
+              <a:defRPr sz="2000">
+                <a:solidFill>
+                  <a:srgbClr val="333333"/>
+                </a:solidFill>
+                <a:latin typeface="Calibri"/>
+              </a:defRPr>
+            </a:pPr>
+            <a:r>
+              <a:t>  Soporte y operaciones: ¿hay un equipo central o cada org se apana?</a:t>
+            </a:r>
+          </a:p>
+          <a:p>
+            <a:pPr>
+              <a:spcAft>
+                <a:spcPts val="800"/>
+              </a:spcAft>
+              <a:defRPr sz="2000">
+                <a:solidFill>
+                  <a:srgbClr val="333333"/>
+                </a:solidFill>
+                <a:latin typeface="Calibri"/>
+              </a:defRPr>
+            </a:pPr>
+            <a:endParaRPr/>
+          </a:p>
+          <a:p>
+            <a:pPr>
+              <a:spcAft>
+                <a:spcPts val="800"/>
+              </a:spcAft>
+              <a:defRPr sz="2000">
+                <a:solidFill>
+                  <a:srgbClr val="333333"/>
+                </a:solidFill>
+                <a:latin typeface="Calibri"/>
+              </a:defRPr>
+            </a:pPr>
+            <a:r>
+              <a:t>Modelos comunes:</a:t>
+            </a:r>
+          </a:p>
+          <a:p>
+            <a:pPr>
+              <a:spcAft>
+                <a:spcPts val="800"/>
+              </a:spcAft>
+              <a:defRPr sz="2000">
+                <a:solidFill>
+                  <a:srgbClr val="333333"/>
+                </a:solidFill>
+                <a:latin typeface="Calibri"/>
+              </a:defRPr>
+            </a:pPr>
+            <a:r>
+              <a:t>  Cuota fija: todos pagan lo mismo (simple, pero ¿justo?)</a:t>
+            </a:r>
+          </a:p>
+          <a:p>
+            <a:pPr>
+              <a:spcAft>
+                <a:spcPts val="800"/>
+              </a:spcAft>
+              <a:defRPr sz="2000">
+                <a:solidFill>
+                  <a:srgbClr val="333333"/>
+                </a:solidFill>
+                <a:latin typeface="Calibri"/>
+              </a:defRPr>
+            </a:pPr>
+            <a:r>
+              <a:t>  Por uso: paga mas quien mas transacciones hace</a:t>
+            </a:r>
+          </a:p>
+          <a:p>
+            <a:pPr>
+              <a:spcAft>
+                <a:spcPts val="800"/>
+              </a:spcAft>
+              <a:defRPr sz="2000">
+                <a:solidFill>
+                  <a:srgbClr val="333333"/>
+                </a:solidFill>
+                <a:latin typeface="Calibri"/>
+              </a:defRPr>
+            </a:pPr>
+            <a:r>
+              <a:t>  Por tamano: las orgs grandes pagan mas que las pequenas</a:t>
+            </a:r>
+          </a:p>
+          <a:p>
+            <a:pPr>
+              <a:spcAft>
+                <a:spcPts val="800"/>
+              </a:spcAft>
+              <a:defRPr sz="2000">
+                <a:solidFill>
+                  <a:srgbClr val="333333"/>
+                </a:solidFill>
+                <a:latin typeface="Calibri"/>
+              </a:defRPr>
+            </a:pPr>
+            <a:r>
+              <a:t>  Sponsor: una org grande subvenciona al resto (al principio)</a:t>
+            </a:r>
+          </a:p>
+        </p:txBody>
+      </p:sp>
+    </p:spTree>
+  </p:cSld>
+  <p:clrMapOvr>
+    <a:masterClrMapping/>
+  </p:clrMapOvr>
+</p:sld>
+</file>
+
+<file path=ppt/slides/slide6.xml><?xml version="1.0" encoding="utf-8"?>
+<p:sld xmlns:a="http://schemas.openxmlformats.org/drawingml/2006/main" xmlns:r="http://schemas.openxmlformats.org/officeDocument/2006/relationships" xmlns:p="http://schemas.openxmlformats.org/presentationml/2006/main">
+  <p:cSld>
+    <p:spTree>
+      <p:nvGrpSpPr>
+        <p:cNvPr id="1" name=""/>
+        <p:cNvGrpSpPr/>
+        <p:nvPr/>
+      </p:nvGrpSpPr>
+      <p:grpSpPr>
+        <a:xfrm>
+          <a:off x="0" y="0"/>
+          <a:ext cx="0" cy="0"/>
+          <a:chOff x="0" y="0"/>
+          <a:chExt cx="0" cy="0"/>
+        </a:xfrm>
+      </p:grpSpPr>
+      <p:sp>
+        <p:nvSpPr>
+          <p:cNvPr id="2" name="Rectangle 1"/>
+          <p:cNvSpPr/>
+          <p:nvPr/>
+        </p:nvSpPr>
+        <p:spPr>
+          <a:xfrm>
+            <a:off x="0" y="0"/>
+            <a:ext cx="12188952" cy="73152"/>
+          </a:xfrm>
+          <a:prstGeom prst="rect">
+            <a:avLst/>
+          </a:prstGeom>
+          <a:solidFill>
+            <a:srgbClr val="22627E"/>
+          </a:solidFill>
+          <a:ln>
+            <a:noFill/>
+          </a:ln>
+        </p:spPr>
+        <p:style>
+          <a:lnRef idx="1">
+            <a:schemeClr val="accent1"/>
+          </a:lnRef>
+          <a:fillRef idx="3">
+            <a:schemeClr val="accent1"/>
+          </a:fillRef>
+          <a:effectRef idx="2">
+            <a:schemeClr val="accent1"/>
+          </a:effectRef>
+          <a:fontRef idx="minor">
+            <a:schemeClr val="lt1"/>
+          </a:fontRef>
+        </p:style>
+        <p:txBody>
+          <a:bodyPr rtlCol="0" anchor="ctr"/>
+          <a:lstStyle/>
+          <a:p>
+            <a:pPr algn="ctr"/>
+            <a:endParaRPr/>
+          </a:p>
+        </p:txBody>
+      </p:sp>
+      <p:sp>
+        <p:nvSpPr>
+          <p:cNvPr id="3" name="TextBox 2"/>
+          <p:cNvSpPr txBox="1"/>
+          <p:nvPr/>
+        </p:nvSpPr>
+        <p:spPr>
+          <a:xfrm>
+            <a:off x="457200" y="274320"/>
+            <a:ext cx="10972800" cy="731520"/>
+          </a:xfrm>
+          <a:prstGeom prst="rect">
+            <a:avLst/>
+          </a:prstGeom>
+          <a:noFill/>
+        </p:spPr>
+        <p:txBody>
+          <a:bodyPr wrap="square"/>
+          <a:lstStyle/>
+          <a:p>
+            <a:pPr algn="l">
+              <a:defRPr sz="3200" b="1">
+                <a:solidFill>
+                  <a:srgbClr val="22627E"/>
+                </a:solidFill>
+                <a:latin typeface="Calibri"/>
+              </a:defRPr>
+            </a:pPr>
+            <a:r>
+              <a:t>Onboarding y offboarding de organizaciones</a:t>
+            </a:r>
+          </a:p>
+        </p:txBody>
+      </p:sp>
+      <p:sp>
+        <p:nvSpPr>
+          <p:cNvPr id="4" name="Rectangle 3"/>
+          <p:cNvSpPr/>
+          <p:nvPr/>
+        </p:nvSpPr>
+        <p:spPr>
+          <a:xfrm>
+            <a:off x="457200" y="1051560"/>
+            <a:ext cx="10972800" cy="27432"/>
+          </a:xfrm>
+          <a:prstGeom prst="rect">
+            <a:avLst/>
+          </a:prstGeom>
+          <a:solidFill>
+            <a:srgbClr val="22627E"/>
+          </a:solidFill>
+          <a:ln>
+            <a:noFill/>
+          </a:ln>
+        </p:spPr>
+        <p:style>
+          <a:lnRef idx="1">
+            <a:schemeClr val="accent1"/>
+          </a:lnRef>
+          <a:fillRef idx="3">
+            <a:schemeClr val="accent1"/>
+          </a:fillRef>
+          <a:effectRef idx="2">
+            <a:schemeClr val="accent1"/>
+          </a:effectRef>
+          <a:fontRef idx="minor">
+            <a:schemeClr val="lt1"/>
+          </a:fontRef>
+        </p:style>
+        <p:txBody>
+          <a:bodyPr rtlCol="0" anchor="ctr"/>
+          <a:lstStyle/>
+          <a:p>
+            <a:pPr algn="ctr"/>
+            <a:endParaRPr/>
+          </a:p>
+        </p:txBody>
+      </p:sp>
+      <p:sp>
+        <p:nvSpPr>
+          <p:cNvPr id="5" name="TextBox 4"/>
+          <p:cNvSpPr txBox="1"/>
+          <p:nvPr/>
+        </p:nvSpPr>
+        <p:spPr>
+          <a:xfrm>
+            <a:off x="640080" y="1280160"/>
+            <a:ext cx="10515600" cy="5029200"/>
+          </a:xfrm>
+          <a:prstGeom prst="rect">
+            <a:avLst/>
+          </a:prstGeom>
+          <a:noFill/>
+        </p:spPr>
+        <p:txBody>
+          <a:bodyPr wrap="square">
+            <a:spAutoFit/>
+          </a:bodyPr>
+          <a:lstStyle/>
+          <a:p>
+            <a:pPr>
+              <a:spcAft>
+                <a:spcPts val="800"/>
+              </a:spcAft>
+              <a:defRPr sz="2000">
+                <a:solidFill>
+                  <a:srgbClr val="333333"/>
+                </a:solidFill>
+                <a:latin typeface="Calibri"/>
+              </a:defRPr>
+            </a:pPr>
+            <a:r>
+              <a:t>Incorporar una nueva org (onboarding):</a:t>
+            </a:r>
+          </a:p>
+          <a:p>
+            <a:pPr lvl="1">
+              <a:spcAft>
+                <a:spcPts val="400"/>
+              </a:spcAft>
+              <a:defRPr sz="1700">
+                <a:solidFill>
+                  <a:srgbClr val="666666"/>
+                </a:solidFill>
+                <a:latin typeface="Calibri"/>
+              </a:defRPr>
+            </a:pPr>
+            <a:r>
+              <a:t>    Evaluacion: ¿cumple los requisitos del consorcio?</a:t>
+            </a:r>
+          </a:p>
+          <a:p>
+            <a:pPr lvl="1">
+              <a:spcAft>
+                <a:spcPts val="400"/>
+              </a:spcAft>
+              <a:defRPr sz="1700">
+                <a:solidFill>
+                  <a:srgbClr val="666666"/>
+                </a:solidFill>
+                <a:latin typeface="Calibri"/>
+              </a:defRPr>
+            </a:pPr>
+            <a:r>
+              <a:t>    Aprobacion: las orgs existentes votan (MAJORITY o ALL)</a:t>
+            </a:r>
+          </a:p>
+          <a:p>
+            <a:pPr lvl="1">
+              <a:spcAft>
+                <a:spcPts val="400"/>
+              </a:spcAft>
+              <a:defRPr sz="1700">
+                <a:solidFill>
+                  <a:srgbClr val="666666"/>
+                </a:solidFill>
+                <a:latin typeface="Calibri"/>
+              </a:defRPr>
+            </a:pPr>
+            <a:r>
+              <a:t>    Tecnico: generar identidades, anadir al canal (doc 06)</a:t>
+            </a:r>
+          </a:p>
+          <a:p>
+            <a:pPr lvl="1">
+              <a:spcAft>
+                <a:spcPts val="400"/>
+              </a:spcAft>
+              <a:defRPr sz="1700">
+                <a:solidFill>
+                  <a:srgbClr val="666666"/>
+                </a:solidFill>
+                <a:latin typeface="Calibri"/>
+              </a:defRPr>
+            </a:pPr>
+            <a:r>
+              <a:t>    Legal: firmar el acuerdo de consorcio</a:t>
+            </a:r>
+          </a:p>
+          <a:p>
+            <a:pPr lvl="1">
+              <a:spcAft>
+                <a:spcPts val="400"/>
+              </a:spcAft>
+              <a:defRPr sz="1700">
+                <a:solidFill>
+                  <a:srgbClr val="666666"/>
+                </a:solidFill>
+                <a:latin typeface="Calibri"/>
+              </a:defRPr>
+            </a:pPr>
+            <a:r>
+              <a:t>    Operativo: instalar chaincodes, sincronizar ledger</a:t>
+            </a:r>
+          </a:p>
+          <a:p>
+            <a:pPr>
+              <a:spcAft>
+                <a:spcPts val="800"/>
+              </a:spcAft>
+              <a:defRPr sz="2000">
+                <a:solidFill>
+                  <a:srgbClr val="333333"/>
+                </a:solidFill>
+                <a:latin typeface="Calibri"/>
+              </a:defRPr>
+            </a:pPr>
+            <a:r>
+              <a:t>Expulsar o que se vaya una org (offboarding):</a:t>
+            </a:r>
+          </a:p>
+          <a:p>
+            <a:pPr lvl="1">
+              <a:spcAft>
+                <a:spcPts val="400"/>
+              </a:spcAft>
+              <a:defRPr sz="1700">
+                <a:solidFill>
+                  <a:srgbClr val="666666"/>
+                </a:solidFill>
+                <a:latin typeface="Calibri"/>
+              </a:defRPr>
+            </a:pPr>
+            <a:r>
+              <a:t>    ¿Que pasa con sus datos en el ledger? (son inmutables, no se pueden borrar)</a:t>
+            </a:r>
+          </a:p>
+          <a:p>
+            <a:pPr lvl="1">
+              <a:spcAft>
+                <a:spcPts val="400"/>
+              </a:spcAft>
+              <a:defRPr sz="1700">
+                <a:solidFill>
+                  <a:srgbClr val="666666"/>
+                </a:solidFill>
+                <a:latin typeface="Calibri"/>
+              </a:defRPr>
+            </a:pPr>
+            <a:r>
+              <a:t>    ¿Que pasa con sus certificados? (revocar via CRL)</a:t>
+            </a:r>
+          </a:p>
+          <a:p>
+            <a:pPr lvl="1">
+              <a:spcAft>
+                <a:spcPts val="400"/>
+              </a:spcAft>
+              <a:defRPr sz="1700">
+                <a:solidFill>
+                  <a:srgbClr val="666666"/>
+                </a:solidFill>
+                <a:latin typeface="Calibri"/>
+              </a:defRPr>
+            </a:pPr>
+            <a:r>
+              <a:t>    ¿Puede llevarse una copia de los datos? (depende del acuerdo)</a:t>
+            </a:r>
+          </a:p>
+          <a:p>
+            <a:pPr lvl="1">
+              <a:spcAft>
+                <a:spcPts val="400"/>
+              </a:spcAft>
+              <a:defRPr sz="1700">
+                <a:solidFill>
+                  <a:srgbClr val="666666"/>
+                </a:solidFill>
+                <a:latin typeface="Calibri"/>
+              </a:defRPr>
+            </a:pPr>
+            <a:r>
+              <a:t>    ¿Como se redistribuyen sus responsabilidades?</a:t>
+            </a:r>
+          </a:p>
+          <a:p>
+            <a:pPr lvl="1">
+              <a:spcAft>
+                <a:spcPts val="400"/>
+              </a:spcAft>
+              <a:defRPr sz="1700">
+                <a:solidFill>
+                  <a:srgbClr val="666666"/>
+                </a:solidFill>
+                <a:latin typeface="Calibri"/>
+              </a:defRPr>
+            </a:pPr>
+            <a:r>
+              <a:t>    Esto DEBE estar definido ANTES de que pase</a:t>
+            </a:r>
+          </a:p>
+        </p:txBody>
+      </p:sp>
+    </p:spTree>
+  </p:cSld>
+  <p:clrMapOvr>
+    <a:masterClrMapping/>
+  </p:clrMapOvr>
+</p:sld>
+</file>
+
+<file path=ppt/slides/slide7.xml><?xml version="1.0" encoding="utf-8"?>
+<p:sld xmlns:a="http://schemas.openxmlformats.org/drawingml/2006/main" xmlns:r="http://schemas.openxmlformats.org/officeDocument/2006/relationships" xmlns:p="http://schemas.openxmlformats.org/presentationml/2006/main">
+  <p:cSld>
+    <p:spTree>
+      <p:nvGrpSpPr>
+        <p:cNvPr id="1" name=""/>
+        <p:cNvGrpSpPr/>
+        <p:nvPr/>
+      </p:nvGrpSpPr>
+      <p:grpSpPr>
+        <a:xfrm>
+          <a:off x="0" y="0"/>
+          <a:ext cx="0" cy="0"/>
+          <a:chOff x="0" y="0"/>
+          <a:chExt cx="0" cy="0"/>
+        </a:xfrm>
+      </p:grpSpPr>
+      <p:sp>
+        <p:nvSpPr>
+          <p:cNvPr id="2" name="Rectangle 1"/>
+          <p:cNvSpPr/>
+          <p:nvPr/>
+        </p:nvSpPr>
+        <p:spPr>
+          <a:xfrm>
+            <a:off x="0" y="0"/>
+            <a:ext cx="12188952" cy="73152"/>
+          </a:xfrm>
+          <a:prstGeom prst="rect">
+            <a:avLst/>
+          </a:prstGeom>
+          <a:solidFill>
+            <a:srgbClr val="22627E"/>
+          </a:solidFill>
+          <a:ln>
+            <a:noFill/>
+          </a:ln>
+        </p:spPr>
+        <p:style>
+          <a:lnRef idx="1">
+            <a:schemeClr val="accent1"/>
+          </a:lnRef>
+          <a:fillRef idx="3">
+            <a:schemeClr val="accent1"/>
+          </a:fillRef>
+          <a:effectRef idx="2">
+            <a:schemeClr val="accent1"/>
+          </a:effectRef>
+          <a:fontRef idx="minor">
+            <a:schemeClr val="lt1"/>
+          </a:fontRef>
+        </p:style>
+        <p:txBody>
+          <a:bodyPr rtlCol="0" anchor="ctr"/>
+          <a:lstStyle/>
+          <a:p>
+            <a:pPr algn="ctr"/>
+            <a:endParaRPr/>
+          </a:p>
+        </p:txBody>
+      </p:sp>
+      <p:sp>
+        <p:nvSpPr>
+          <p:cNvPr id="3" name="TextBox 2"/>
+          <p:cNvSpPr txBox="1"/>
+          <p:nvPr/>
+        </p:nvSpPr>
+        <p:spPr>
+          <a:xfrm>
+            <a:off x="457200" y="274320"/>
+            <a:ext cx="10972800" cy="731520"/>
+          </a:xfrm>
+          <a:prstGeom prst="rect">
+            <a:avLst/>
+          </a:prstGeom>
+          <a:noFill/>
+        </p:spPr>
+        <p:txBody>
+          <a:bodyPr wrap="square"/>
+          <a:lstStyle/>
+          <a:p>
+            <a:pPr algn="l">
+              <a:defRPr sz="3200" b="1">
+                <a:solidFill>
+                  <a:srgbClr val="22627E"/>
+                </a:solidFill>
+                <a:latin typeface="Calibri"/>
+              </a:defRPr>
+            </a:pPr>
+            <a:r>
+              <a:t>Caso Alastria: gobernanza de un consorcio real</a:t>
+            </a:r>
+          </a:p>
+        </p:txBody>
+      </p:sp>
+      <p:sp>
+        <p:nvSpPr>
+          <p:cNvPr id="4" name="Rectangle 3"/>
+          <p:cNvSpPr/>
+          <p:nvPr/>
+        </p:nvSpPr>
+        <p:spPr>
+          <a:xfrm>
+            <a:off x="457200" y="1051560"/>
+            <a:ext cx="10972800" cy="27432"/>
+          </a:xfrm>
+          <a:prstGeom prst="rect">
+            <a:avLst/>
+          </a:prstGeom>
+          <a:solidFill>
+            <a:srgbClr val="22627E"/>
+          </a:solidFill>
+          <a:ln>
+            <a:noFill/>
+          </a:ln>
+        </p:spPr>
+        <p:style>
+          <a:lnRef idx="1">
+            <a:schemeClr val="accent1"/>
+          </a:lnRef>
+          <a:fillRef idx="3">
+            <a:schemeClr val="accent1"/>
+          </a:fillRef>
+          <a:effectRef idx="2">
+            <a:schemeClr val="accent1"/>
+          </a:effectRef>
+          <a:fontRef idx="minor">
+            <a:schemeClr val="lt1"/>
+          </a:fontRef>
+        </p:style>
+        <p:txBody>
+          <a:bodyPr rtlCol="0" anchor="ctr"/>
+          <a:lstStyle/>
+          <a:p>
+            <a:pPr algn="ctr"/>
+            <a:endParaRPr/>
+          </a:p>
+        </p:txBody>
+      </p:sp>
+      <p:sp>
+        <p:nvSpPr>
+          <p:cNvPr id="5" name="TextBox 4"/>
+          <p:cNvSpPr txBox="1"/>
+          <p:nvPr/>
+        </p:nvSpPr>
+        <p:spPr>
+          <a:xfrm>
+            <a:off x="640080" y="1280160"/>
+            <a:ext cx="10515600" cy="5029200"/>
+          </a:xfrm>
+          <a:prstGeom prst="rect">
+            <a:avLst/>
+          </a:prstGeom>
+          <a:noFill/>
+        </p:spPr>
+        <p:txBody>
+          <a:bodyPr wrap="square">
+            <a:spAutoFit/>
+          </a:bodyPr>
+          <a:lstStyle/>
+          <a:p>
+            <a:pPr>
+              <a:spcAft>
+                <a:spcPts val="800"/>
+              </a:spcAft>
+              <a:defRPr sz="2000">
+                <a:solidFill>
+                  <a:srgbClr val="333333"/>
+                </a:solidFill>
+                <a:latin typeface="Calibri"/>
+              </a:defRPr>
+            </a:pPr>
+            <a:r>
               <a:t>Alastria es una asociacion sin animo de lucro con +500 miembros</a:t>
             </a:r>
           </a:p>
@@ -5295,7 +7857,7 @@
 </file>
 
 <file path=ppt/slides/slide8.xml><?xml version="1.0" encoding="utf-8"?>
-<p:sld xmlns:a="http://schemas.openxmlformats.org/drawingml/2006/main" xmlns:p="http://schemas.openxmlformats.org/presentationml/2006/main" xmlns:r="http://schemas.openxmlformats.org/officeDocument/2006/relationships">
+<p:sld xmlns:a="http://schemas.openxmlformats.org/drawingml/2006/main" xmlns:r="http://schemas.openxmlformats.org/officeDocument/2006/relationships" xmlns:p="http://schemas.openxmlformats.org/presentationml/2006/main">
   <p:cSld>
     <p:spTree>
       <p:nvGrpSpPr>
@@ -5303,7 +7865,14 @@
         <p:cNvGrpSpPr/>
         <p:nvPr/>
       </p:nvGrpSpPr>
-      <p:grpSpPr/>
+      <p:grpSpPr>
+        <a:xfrm>
+          <a:off x="0" y="0"/>
+          <a:ext cx="0" cy="0"/>
+          <a:chOff x="0" y="0"/>
+          <a:chExt cx="0" cy="0"/>
+        </a:xfrm>
+      </p:grpSpPr>
       <p:sp>
         <p:nvSpPr>
           <p:cNvPr id="2" name="Rectangle 1"/>
@@ -5344,6 +7913,7 @@
           <a:lstStyle/>
           <a:p>
             <a:pPr algn="ctr"/>
+            <a:endParaRPr/>
           </a:p>
         </p:txBody>
       </p:sp>
@@ -5387,6 +7957,7 @@
           <a:lstStyle/>
           <a:p>
             <a:pPr algn="ctr"/>
+            <a:endParaRPr/>
           </a:p>
         </p:txBody>
       </p:sp>
@@ -5498,6 +8069,7 @@
           <a:lstStyle/>
           <a:p>
             <a:pPr algn="ctr"/>
+            <a:endParaRPr/>
           </a:p>
         </p:txBody>
       </p:sp>
@@ -5550,6 +8122,7 @@
                 <a:latin typeface="Calibri"/>
               </a:defRPr>
             </a:pPr>
+            <a:endParaRPr/>
           </a:p>
           <a:p>
             <a:pPr>
@@ -5658,7 +8231,7 @@
 </file>
 
 <file path=ppt/slides/slide9.xml><?xml version="1.0" encoding="utf-8"?>
-<p:sld xmlns:a="http://schemas.openxmlformats.org/drawingml/2006/main" xmlns:p="http://schemas.openxmlformats.org/presentationml/2006/main" xmlns:r="http://schemas.openxmlformats.org/officeDocument/2006/relationships">
+<p:sld xmlns:a="http://schemas.openxmlformats.org/drawingml/2006/main" xmlns:r="http://schemas.openxmlformats.org/officeDocument/2006/relationships" xmlns:p="http://schemas.openxmlformats.org/presentationml/2006/main">
   <p:cSld>
     <p:spTree>
       <p:nvGrpSpPr>
@@ -5666,7 +8239,14 @@
         <p:cNvGrpSpPr/>
         <p:nvPr/>
       </p:nvGrpSpPr>
-      <p:grpSpPr/>
+      <p:grpSpPr>
+        <a:xfrm>
+          <a:off x="0" y="0"/>
+          <a:ext cx="0" cy="0"/>
+          <a:chOff x="0" y="0"/>
+          <a:chExt cx="0" cy="0"/>
+        </a:xfrm>
+      </p:grpSpPr>
       <p:sp>
         <p:nvSpPr>
           <p:cNvPr id="2" name="Rectangle 1"/>
@@ -5707,6 +8287,7 @@
           <a:lstStyle/>
           <a:p>
             <a:pPr algn="ctr"/>
+            <a:endParaRPr/>
           </a:p>
         </p:txBody>
       </p:sp>
@@ -5784,6 +8365,7 @@
           <a:lstStyle/>
           <a:p>
             <a:pPr algn="ctr"/>
+            <a:endParaRPr/>
           </a:p>
         </p:txBody>
       </p:sp>
